--- a/docs/BitFlow - Abschlusspräsentation.pptx
+++ b/docs/BitFlow - Abschlusspräsentation.pptx
@@ -21,15 +21,15 @@
     <p:sldId id="299" r:id="rId12"/>
     <p:sldId id="300" r:id="rId13"/>
     <p:sldId id="304" r:id="rId14"/>
-    <p:sldId id="321" r:id="rId15"/>
-    <p:sldId id="301" r:id="rId16"/>
-    <p:sldId id="317" r:id="rId17"/>
-    <p:sldId id="320" r:id="rId18"/>
-    <p:sldId id="318" r:id="rId19"/>
-    <p:sldId id="319" r:id="rId20"/>
-    <p:sldId id="315" r:id="rId21"/>
-    <p:sldId id="316" r:id="rId22"/>
-    <p:sldId id="314" r:id="rId23"/>
+    <p:sldId id="301" r:id="rId15"/>
+    <p:sldId id="313" r:id="rId16"/>
+    <p:sldId id="314" r:id="rId17"/>
+    <p:sldId id="315" r:id="rId18"/>
+    <p:sldId id="316" r:id="rId19"/>
+    <p:sldId id="317" r:id="rId20"/>
+    <p:sldId id="318" r:id="rId21"/>
+    <p:sldId id="320" r:id="rId22"/>
+    <p:sldId id="319" r:id="rId23"/>
     <p:sldId id="302" r:id="rId24"/>
     <p:sldId id="307" r:id="rId25"/>
     <p:sldId id="306" r:id="rId26"/>
@@ -166,29 +166,6 @@
 </p:cmAuthorLst>
 </file>
 
-<file path=ppt/revisionInfo.xml><?xml version="1.0" encoding="utf-8"?>
-<p1510:revInfo xmlns:a="http://schemas.openxmlformats.org/drawingml/2006/main" xmlns:r="http://schemas.openxmlformats.org/officeDocument/2006/relationships" xmlns:p1510="http://schemas.microsoft.com/office/powerpoint/2015/10/main">
-  <p1510:revLst>
-    <p1510:client id="{136281E5-2804-A349-9110-A6017AFCAE0F}" v="2" dt="2026-06-02T10:38:04.498"/>
-    <p1510:client id="{18817297-3123-E962-0D50-1BB07540478E}" v="108" dt="2026-06-02T14:22:49.728"/>
-    <p1510:client id="{2A653CB5-0597-4876-505E-072357B9264C}" v="272" dt="2026-06-01T20:16:19.544"/>
-    <p1510:client id="{2A705EDA-9157-A1E7-D3A6-06EB5379A303}" v="45" dt="2026-06-02T14:14:47.237"/>
-    <p1510:client id="{2C2814E4-A0DB-BB51-4783-AE6004692B5F}" v="67" dt="2026-06-02T12:59:43.033"/>
-    <p1510:client id="{2DD1B7F6-00B7-C618-D5C1-ED101C5806B7}" v="2" dt="2026-06-02T14:05:39.560"/>
-    <p1510:client id="{30074C4A-C544-FE73-78BC-015A541081F2}" v="71" dt="2026-06-02T14:18:57.452"/>
-    <p1510:client id="{54E21988-B738-18DF-6789-9522AD3BADFB}" v="23" dt="2026-06-01T19:53:52.389"/>
-    <p1510:client id="{66E7E41D-D012-7481-7AB6-CE3A1AB74DE8}" v="6" dt="2026-06-02T14:18:56.683"/>
-    <p1510:client id="{836E2A5C-359F-3846-B19B-16394E633B48}" v="11" dt="2026-06-02T14:02:31.934"/>
-    <p1510:client id="{8B0C8862-04CD-DF6D-DAE5-DAC0D80B2DD6}" v="2" dt="2026-06-02T10:32:59.460"/>
-    <p1510:client id="{B7B6244A-ECD5-4DE0-ED87-CDC1C30857EA}" v="4" dt="2026-06-02T10:45:15.414"/>
-    <p1510:client id="{BDD642B2-2797-FBCE-1F70-2E2363B343BC}" v="70" dt="2026-06-02T13:57:26.873"/>
-    <p1510:client id="{CD681296-AE77-D5DD-1997-8873B5975865}" v="1" dt="2026-06-02T14:04:24.954"/>
-    <p1510:client id="{DB7A643C-02F6-A496-3008-D44980E0897D}" v="22" dt="2026-06-01T16:07:14.570"/>
-    <p1510:client id="{F27A7F8F-03AA-12DF-B7A4-9C9231C52885}" v="89" dt="2026-06-02T10:32:49.178"/>
-  </p1510:revLst>
-</p1510:revInfo>
-</file>
-
 <file path=ppt/handoutMasters/handoutMaster1.xml><?xml version="1.0" encoding="utf-8"?>
 <p:handoutMaster xmlns:a="http://schemas.openxmlformats.org/drawingml/2006/main" xmlns:r="http://schemas.openxmlformats.org/officeDocument/2006/relationships" xmlns:p="http://schemas.openxmlformats.org/presentationml/2006/main">
   <p:cSld>
@@ -285,7 +262,7 @@
             <a:pPr rtl="0"/>
             <a:fld id="{45A4BAD4-14F2-4D4A-BAC1-A644C6A8B8B8}" type="datetime1">
               <a:rPr lang="de-DE" smtClean="0"/>
-              <a:t>02.06.2026</a:t>
+              <a:t>03.06.2026</a:t>
             </a:fld>
             <a:endParaRPr lang="de-DE"/>
           </a:p>
@@ -467,7 +444,7 @@
             <a:fld id="{B30F6048-6F8A-4683-A7AB-9FF3D1DE1A65}" type="datetime1">
               <a:rPr lang="de-DE" smtClean="0"/>
               <a:pPr/>
-              <a:t>02.06.2026</a:t>
+              <a:t>03.06.2026</a:t>
             </a:fld>
             <a:endParaRPr lang="de-DE"/>
           </a:p>
@@ -965,48 +942,7 @@
           <a:bodyPr/>
           <a:lstStyle/>
           <a:p>
-            <a:r>
-              <a:rPr lang="de-DE"/>
-              <a:t>Simon: Custom-Gatter (+Importieren), Generische-Gatter </a:t>
-            </a:r>
-          </a:p>
-          <a:p>
-            <a:r>
-              <a:rPr lang="de-DE"/>
-              <a:t>Mohid: Mehrbenutzer-Modus </a:t>
-            </a:r>
-          </a:p>
-          <a:p>
-            <a:r>
-              <a:rPr lang="de-DE"/>
-              <a:t>Moritz: Anmeldung, allgemein UI (außerhalb und in einem Projekt) </a:t>
-            </a:r>
-          </a:p>
-          <a:p>
-            <a:r>
-              <a:rPr lang="de-DE"/>
-              <a:t>Florian: </a:t>
-            </a:r>
-            <a:r>
-              <a:rPr lang="de-DE" err="1"/>
-              <a:t>Volladdierer</a:t>
-            </a:r>
-            <a:r>
-              <a:rPr lang="de-DE"/>
-              <a:t> bauen, (aus Custom-</a:t>
-            </a:r>
-            <a:r>
-              <a:rPr lang="de-DE" err="1"/>
-              <a:t>Halbaddierern</a:t>
-            </a:r>
-            <a:r>
-              <a:rPr lang="de-DE"/>
-              <a:t>) (oder irgendwas anderes)</a:t>
-            </a:r>
-            <a:endParaRPr lang="de-DE">
-              <a:ea typeface="Calibri"/>
-              <a:cs typeface="Calibri"/>
-            </a:endParaRPr>
+            <a:endParaRPr lang="de-DE" dirty="0"/>
           </a:p>
         </p:txBody>
       </p:sp>
@@ -1028,7 +964,7 @@
             <a:pPr rtl="0"/>
             <a:fld id="{D4B9A9E5-4F7F-4A7D-9DE1-899232329269}" type="slidenum">
               <a:rPr lang="de-DE" noProof="0" smtClean="0"/>
-              <a:t>12</a:t>
+              <a:t>11</a:t>
             </a:fld>
             <a:endParaRPr lang="de-DE" noProof="0"/>
           </a:p>
@@ -1091,48 +1027,7 @@
           <a:bodyPr/>
           <a:lstStyle/>
           <a:p>
-            <a:r>
-              <a:rPr lang="de-DE"/>
-              <a:t>Simon: Custom-Gatter (+Importieren), Generische-Gatter </a:t>
-            </a:r>
-          </a:p>
-          <a:p>
-            <a:r>
-              <a:rPr lang="de-DE"/>
-              <a:t>Mohid: Mehrbenutzer-Modus </a:t>
-            </a:r>
-          </a:p>
-          <a:p>
-            <a:r>
-              <a:rPr lang="de-DE"/>
-              <a:t>Moritz: Anmeldung, allgemein UI (außerhalb und in einem Projekt) </a:t>
-            </a:r>
-          </a:p>
-          <a:p>
-            <a:r>
-              <a:rPr lang="de-DE"/>
-              <a:t>Florian: </a:t>
-            </a:r>
-            <a:r>
-              <a:rPr lang="de-DE" err="1"/>
-              <a:t>Volladdierer</a:t>
-            </a:r>
-            <a:r>
-              <a:rPr lang="de-DE"/>
-              <a:t> bauen, (aus Custom-</a:t>
-            </a:r>
-            <a:r>
-              <a:rPr lang="de-DE" err="1"/>
-              <a:t>Halbaddierern</a:t>
-            </a:r>
-            <a:r>
-              <a:rPr lang="de-DE"/>
-              <a:t>) (oder irgendwas anderes)</a:t>
-            </a:r>
-            <a:endParaRPr lang="de-DE">
-              <a:ea typeface="Calibri"/>
-              <a:cs typeface="Calibri"/>
-            </a:endParaRPr>
+            <a:endParaRPr lang="de-DE" dirty="0"/>
           </a:p>
         </p:txBody>
       </p:sp>
@@ -1154,7 +1049,7 @@
             <a:pPr rtl="0"/>
             <a:fld id="{D4B9A9E5-4F7F-4A7D-9DE1-899232329269}" type="slidenum">
               <a:rPr lang="de-DE" noProof="0" smtClean="0"/>
-              <a:t>13</a:t>
+              <a:t>12</a:t>
             </a:fld>
             <a:endParaRPr lang="de-DE" noProof="0"/>
           </a:p>
@@ -1163,7 +1058,7 @@
     </p:spTree>
     <p:extLst>
       <p:ext uri="{BB962C8B-B14F-4D97-AF65-F5344CB8AC3E}">
-        <p14:creationId xmlns:p14="http://schemas.microsoft.com/office/powerpoint/2010/main" val="483810555"/>
+        <p14:creationId xmlns:p14="http://schemas.microsoft.com/office/powerpoint/2010/main" val="2294665226"/>
       </p:ext>
     </p:extLst>
   </p:cSld>
@@ -1217,48 +1112,7 @@
           <a:bodyPr/>
           <a:lstStyle/>
           <a:p>
-            <a:r>
-              <a:rPr lang="de-DE"/>
-              <a:t>Simon: Custom-Gatter (+Importieren), Generische-Gatter </a:t>
-            </a:r>
-          </a:p>
-          <a:p>
-            <a:r>
-              <a:rPr lang="de-DE"/>
-              <a:t>Mohid: Mehrbenutzer-Modus </a:t>
-            </a:r>
-          </a:p>
-          <a:p>
-            <a:r>
-              <a:rPr lang="de-DE"/>
-              <a:t>Moritz: Anmeldung, allgemein UI (außerhalb und in einem Projekt) </a:t>
-            </a:r>
-          </a:p>
-          <a:p>
-            <a:r>
-              <a:rPr lang="de-DE"/>
-              <a:t>Florian: </a:t>
-            </a:r>
-            <a:r>
-              <a:rPr lang="de-DE" err="1"/>
-              <a:t>Volladdierer</a:t>
-            </a:r>
-            <a:r>
-              <a:rPr lang="de-DE"/>
-              <a:t> bauen, (aus Custom-</a:t>
-            </a:r>
-            <a:r>
-              <a:rPr lang="de-DE" err="1"/>
-              <a:t>Halbaddierern</a:t>
-            </a:r>
-            <a:r>
-              <a:rPr lang="de-DE"/>
-              <a:t>) (oder irgendwas anderes)</a:t>
-            </a:r>
-            <a:endParaRPr lang="de-DE">
-              <a:ea typeface="Calibri"/>
-              <a:cs typeface="Calibri"/>
-            </a:endParaRPr>
+            <a:endParaRPr lang="de-DE" dirty="0"/>
           </a:p>
         </p:txBody>
       </p:sp>
@@ -1280,7 +1134,7 @@
             <a:pPr rtl="0"/>
             <a:fld id="{D4B9A9E5-4F7F-4A7D-9DE1-899232329269}" type="slidenum">
               <a:rPr lang="de-DE" noProof="0" smtClean="0"/>
-              <a:t>14</a:t>
+              <a:t>13</a:t>
             </a:fld>
             <a:endParaRPr lang="de-DE" noProof="0"/>
           </a:p>
@@ -1289,7 +1143,7 @@
     </p:spTree>
     <p:extLst>
       <p:ext uri="{BB962C8B-B14F-4D97-AF65-F5344CB8AC3E}">
-        <p14:creationId xmlns:p14="http://schemas.microsoft.com/office/powerpoint/2010/main" val="2035993293"/>
+        <p14:creationId xmlns:p14="http://schemas.microsoft.com/office/powerpoint/2010/main" val="3558857363"/>
       </p:ext>
     </p:extLst>
   </p:cSld>
@@ -1343,48 +1197,7 @@
           <a:bodyPr/>
           <a:lstStyle/>
           <a:p>
-            <a:r>
-              <a:rPr lang="de-DE"/>
-              <a:t>Simon: Custom-Gatter (+Importieren), Generische-Gatter </a:t>
-            </a:r>
-          </a:p>
-          <a:p>
-            <a:r>
-              <a:rPr lang="de-DE"/>
-              <a:t>Mohid: Mehrbenutzer-Modus </a:t>
-            </a:r>
-          </a:p>
-          <a:p>
-            <a:r>
-              <a:rPr lang="de-DE"/>
-              <a:t>Moritz: Anmeldung, allgemein UI (außerhalb und in einem Projekt) </a:t>
-            </a:r>
-          </a:p>
-          <a:p>
-            <a:r>
-              <a:rPr lang="de-DE"/>
-              <a:t>Florian: </a:t>
-            </a:r>
-            <a:r>
-              <a:rPr lang="de-DE" err="1"/>
-              <a:t>Volladdierer</a:t>
-            </a:r>
-            <a:r>
-              <a:rPr lang="de-DE"/>
-              <a:t> bauen, (aus Custom-</a:t>
-            </a:r>
-            <a:r>
-              <a:rPr lang="de-DE" err="1"/>
-              <a:t>Halbaddierern</a:t>
-            </a:r>
-            <a:r>
-              <a:rPr lang="de-DE"/>
-              <a:t>) (oder irgendwas anderes)</a:t>
-            </a:r>
-            <a:endParaRPr lang="de-DE">
-              <a:ea typeface="Calibri"/>
-              <a:cs typeface="Calibri"/>
-            </a:endParaRPr>
+            <a:endParaRPr lang="de-DE" dirty="0"/>
           </a:p>
         </p:txBody>
       </p:sp>
@@ -1406,7 +1219,7 @@
             <a:pPr rtl="0"/>
             <a:fld id="{D4B9A9E5-4F7F-4A7D-9DE1-899232329269}" type="slidenum">
               <a:rPr lang="de-DE" noProof="0" smtClean="0"/>
-              <a:t>15</a:t>
+              <a:t>14</a:t>
             </a:fld>
             <a:endParaRPr lang="de-DE" noProof="0"/>
           </a:p>
@@ -1415,7 +1228,7 @@
     </p:spTree>
     <p:extLst>
       <p:ext uri="{BB962C8B-B14F-4D97-AF65-F5344CB8AC3E}">
-        <p14:creationId xmlns:p14="http://schemas.microsoft.com/office/powerpoint/2010/main" val="467973999"/>
+        <p14:creationId xmlns:p14="http://schemas.microsoft.com/office/powerpoint/2010/main" val="921140283"/>
       </p:ext>
     </p:extLst>
   </p:cSld>
@@ -1469,48 +1282,7 @@
           <a:bodyPr/>
           <a:lstStyle/>
           <a:p>
-            <a:r>
-              <a:rPr lang="de-DE"/>
-              <a:t>Simon: Custom-Gatter (+Importieren), Generische-Gatter </a:t>
-            </a:r>
-          </a:p>
-          <a:p>
-            <a:r>
-              <a:rPr lang="de-DE"/>
-              <a:t>Mohid: Mehrbenutzer-Modus </a:t>
-            </a:r>
-          </a:p>
-          <a:p>
-            <a:r>
-              <a:rPr lang="de-DE"/>
-              <a:t>Moritz: Anmeldung, allgemein UI (außerhalb und in einem Projekt) </a:t>
-            </a:r>
-          </a:p>
-          <a:p>
-            <a:r>
-              <a:rPr lang="de-DE"/>
-              <a:t>Florian: </a:t>
-            </a:r>
-            <a:r>
-              <a:rPr lang="de-DE" err="1"/>
-              <a:t>Volladdierer</a:t>
-            </a:r>
-            <a:r>
-              <a:rPr lang="de-DE"/>
-              <a:t> bauen, (aus Custom-</a:t>
-            </a:r>
-            <a:r>
-              <a:rPr lang="de-DE" err="1"/>
-              <a:t>Halbaddierern</a:t>
-            </a:r>
-            <a:r>
-              <a:rPr lang="de-DE"/>
-              <a:t>) (oder irgendwas anderes)</a:t>
-            </a:r>
-            <a:endParaRPr lang="de-DE">
-              <a:ea typeface="Calibri"/>
-              <a:cs typeface="Calibri"/>
-            </a:endParaRPr>
+            <a:endParaRPr lang="de-DE" dirty="0"/>
           </a:p>
         </p:txBody>
       </p:sp>
@@ -1532,7 +1304,7 @@
             <a:pPr rtl="0"/>
             <a:fld id="{D4B9A9E5-4F7F-4A7D-9DE1-899232329269}" type="slidenum">
               <a:rPr lang="de-DE" noProof="0" smtClean="0"/>
-              <a:t>16</a:t>
+              <a:t>15</a:t>
             </a:fld>
             <a:endParaRPr lang="de-DE" noProof="0"/>
           </a:p>
@@ -1541,7 +1313,7 @@
     </p:spTree>
     <p:extLst>
       <p:ext uri="{BB962C8B-B14F-4D97-AF65-F5344CB8AC3E}">
-        <p14:creationId xmlns:p14="http://schemas.microsoft.com/office/powerpoint/2010/main" val="2501178759"/>
+        <p14:creationId xmlns:p14="http://schemas.microsoft.com/office/powerpoint/2010/main" val="2747373770"/>
       </p:ext>
     </p:extLst>
   </p:cSld>
@@ -1595,48 +1367,7 @@
           <a:bodyPr/>
           <a:lstStyle/>
           <a:p>
-            <a:r>
-              <a:rPr lang="de-DE"/>
-              <a:t>Simon: Custom-Gatter (+Importieren), Generische-Gatter </a:t>
-            </a:r>
-          </a:p>
-          <a:p>
-            <a:r>
-              <a:rPr lang="de-DE"/>
-              <a:t>Mohid: Mehrbenutzer-Modus </a:t>
-            </a:r>
-          </a:p>
-          <a:p>
-            <a:r>
-              <a:rPr lang="de-DE"/>
-              <a:t>Moritz: Anmeldung, allgemein UI (außerhalb und in einem Projekt) </a:t>
-            </a:r>
-          </a:p>
-          <a:p>
-            <a:r>
-              <a:rPr lang="de-DE"/>
-              <a:t>Florian: </a:t>
-            </a:r>
-            <a:r>
-              <a:rPr lang="de-DE" err="1"/>
-              <a:t>Volladdierer</a:t>
-            </a:r>
-            <a:r>
-              <a:rPr lang="de-DE"/>
-              <a:t> bauen, (aus Custom-</a:t>
-            </a:r>
-            <a:r>
-              <a:rPr lang="de-DE" err="1"/>
-              <a:t>Halbaddierern</a:t>
-            </a:r>
-            <a:r>
-              <a:rPr lang="de-DE"/>
-              <a:t>) (oder irgendwas anderes)</a:t>
-            </a:r>
-            <a:endParaRPr lang="de-DE">
-              <a:ea typeface="Calibri"/>
-              <a:cs typeface="Calibri"/>
-            </a:endParaRPr>
+            <a:endParaRPr lang="de-DE" dirty="0"/>
           </a:p>
         </p:txBody>
       </p:sp>
@@ -1658,7 +1389,7 @@
             <a:pPr rtl="0"/>
             <a:fld id="{D4B9A9E5-4F7F-4A7D-9DE1-899232329269}" type="slidenum">
               <a:rPr lang="de-DE" noProof="0" smtClean="0"/>
-              <a:t>17</a:t>
+              <a:t>16</a:t>
             </a:fld>
             <a:endParaRPr lang="de-DE" noProof="0"/>
           </a:p>
@@ -1667,7 +1398,7 @@
     </p:spTree>
     <p:extLst>
       <p:ext uri="{BB962C8B-B14F-4D97-AF65-F5344CB8AC3E}">
-        <p14:creationId xmlns:p14="http://schemas.microsoft.com/office/powerpoint/2010/main" val="1130770760"/>
+        <p14:creationId xmlns:p14="http://schemas.microsoft.com/office/powerpoint/2010/main" val="1661667285"/>
       </p:ext>
     </p:extLst>
   </p:cSld>
@@ -1721,48 +1452,7 @@
           <a:bodyPr/>
           <a:lstStyle/>
           <a:p>
-            <a:r>
-              <a:rPr lang="de-DE"/>
-              <a:t>Simon: Custom-Gatter (+Importieren), Generische-Gatter </a:t>
-            </a:r>
-          </a:p>
-          <a:p>
-            <a:r>
-              <a:rPr lang="de-DE"/>
-              <a:t>Mohid: Mehrbenutzer-Modus </a:t>
-            </a:r>
-          </a:p>
-          <a:p>
-            <a:r>
-              <a:rPr lang="de-DE"/>
-              <a:t>Moritz: Anmeldung, allgemein UI (außerhalb und in einem Projekt) </a:t>
-            </a:r>
-          </a:p>
-          <a:p>
-            <a:r>
-              <a:rPr lang="de-DE"/>
-              <a:t>Florian: </a:t>
-            </a:r>
-            <a:r>
-              <a:rPr lang="de-DE" err="1"/>
-              <a:t>Volladdierer</a:t>
-            </a:r>
-            <a:r>
-              <a:rPr lang="de-DE"/>
-              <a:t> bauen, (aus Custom-</a:t>
-            </a:r>
-            <a:r>
-              <a:rPr lang="de-DE" err="1"/>
-              <a:t>Halbaddierern</a:t>
-            </a:r>
-            <a:r>
-              <a:rPr lang="de-DE"/>
-              <a:t>) (oder irgendwas anderes)</a:t>
-            </a:r>
-            <a:endParaRPr lang="de-DE">
-              <a:ea typeface="Calibri"/>
-              <a:cs typeface="Calibri"/>
-            </a:endParaRPr>
+            <a:endParaRPr lang="de-DE" dirty="0"/>
           </a:p>
         </p:txBody>
       </p:sp>
@@ -1784,7 +1474,7 @@
             <a:pPr rtl="0"/>
             <a:fld id="{D4B9A9E5-4F7F-4A7D-9DE1-899232329269}" type="slidenum">
               <a:rPr lang="de-DE" noProof="0" smtClean="0"/>
-              <a:t>18</a:t>
+              <a:t>17</a:t>
             </a:fld>
             <a:endParaRPr lang="de-DE" noProof="0"/>
           </a:p>
@@ -1793,7 +1483,7 @@
     </p:spTree>
     <p:extLst>
       <p:ext uri="{BB962C8B-B14F-4D97-AF65-F5344CB8AC3E}">
-        <p14:creationId xmlns:p14="http://schemas.microsoft.com/office/powerpoint/2010/main" val="2551766819"/>
+        <p14:creationId xmlns:p14="http://schemas.microsoft.com/office/powerpoint/2010/main" val="1562460409"/>
       </p:ext>
     </p:extLst>
   </p:cSld>
@@ -1847,48 +1537,7 @@
           <a:bodyPr/>
           <a:lstStyle/>
           <a:p>
-            <a:r>
-              <a:rPr lang="de-DE"/>
-              <a:t>Simon: Custom-Gatter (+Importieren), Generische-Gatter </a:t>
-            </a:r>
-          </a:p>
-          <a:p>
-            <a:r>
-              <a:rPr lang="de-DE"/>
-              <a:t>Mohid: Mehrbenutzer-Modus </a:t>
-            </a:r>
-          </a:p>
-          <a:p>
-            <a:r>
-              <a:rPr lang="de-DE"/>
-              <a:t>Moritz: Anmeldung, allgemein UI (außerhalb und in einem Projekt) </a:t>
-            </a:r>
-          </a:p>
-          <a:p>
-            <a:r>
-              <a:rPr lang="de-DE"/>
-              <a:t>Florian: </a:t>
-            </a:r>
-            <a:r>
-              <a:rPr lang="de-DE" err="1"/>
-              <a:t>Volladdierer</a:t>
-            </a:r>
-            <a:r>
-              <a:rPr lang="de-DE"/>
-              <a:t> bauen, (aus Custom-</a:t>
-            </a:r>
-            <a:r>
-              <a:rPr lang="de-DE" err="1"/>
-              <a:t>Halbaddierern</a:t>
-            </a:r>
-            <a:r>
-              <a:rPr lang="de-DE"/>
-              <a:t>) (oder irgendwas anderes)</a:t>
-            </a:r>
-            <a:endParaRPr lang="de-DE">
-              <a:ea typeface="Calibri"/>
-              <a:cs typeface="Calibri"/>
-            </a:endParaRPr>
+            <a:endParaRPr lang="de-DE" dirty="0"/>
           </a:p>
         </p:txBody>
       </p:sp>
@@ -1910,7 +1559,7 @@
             <a:pPr rtl="0"/>
             <a:fld id="{D4B9A9E5-4F7F-4A7D-9DE1-899232329269}" type="slidenum">
               <a:rPr lang="de-DE" noProof="0" smtClean="0"/>
-              <a:t>19</a:t>
+              <a:t>18</a:t>
             </a:fld>
             <a:endParaRPr lang="de-DE" noProof="0"/>
           </a:p>
@@ -1919,7 +1568,7 @@
     </p:spTree>
     <p:extLst>
       <p:ext uri="{BB962C8B-B14F-4D97-AF65-F5344CB8AC3E}">
-        <p14:creationId xmlns:p14="http://schemas.microsoft.com/office/powerpoint/2010/main" val="3208100857"/>
+        <p14:creationId xmlns:p14="http://schemas.microsoft.com/office/powerpoint/2010/main" val="1532546887"/>
       </p:ext>
     </p:extLst>
   </p:cSld>
@@ -1973,17 +1622,7 @@
           <a:bodyPr/>
           <a:lstStyle/>
           <a:p>
-            <a:r>
-              <a:rPr lang="de-DE">
-                <a:ea typeface="Calibri"/>
-                <a:cs typeface="Calibri"/>
-              </a:rPr>
-              <a:t>Simon</a:t>
-            </a:r>
-            <a:endParaRPr lang="en-US">
-              <a:ea typeface="Calibri"/>
-              <a:cs typeface="Calibri"/>
-            </a:endParaRPr>
+            <a:endParaRPr lang="de-DE" dirty="0"/>
           </a:p>
         </p:txBody>
       </p:sp>
@@ -2005,7 +1644,7 @@
             <a:pPr rtl="0"/>
             <a:fld id="{D4B9A9E5-4F7F-4A7D-9DE1-899232329269}" type="slidenum">
               <a:rPr lang="de-DE" noProof="0" smtClean="0"/>
-              <a:t>20</a:t>
+              <a:t>19</a:t>
             </a:fld>
             <a:endParaRPr lang="de-DE" noProof="0"/>
           </a:p>
@@ -2014,7 +1653,7 @@
     </p:spTree>
     <p:extLst>
       <p:ext uri="{BB962C8B-B14F-4D97-AF65-F5344CB8AC3E}">
-        <p14:creationId xmlns:p14="http://schemas.microsoft.com/office/powerpoint/2010/main" val="2248576669"/>
+        <p14:creationId xmlns:p14="http://schemas.microsoft.com/office/powerpoint/2010/main" val="857358698"/>
       </p:ext>
     </p:extLst>
   </p:cSld>
@@ -2164,6 +1803,101 @@
           <a:lstStyle/>
           <a:p>
             <a:r>
+              <a:rPr lang="de-DE">
+                <a:ea typeface="Calibri"/>
+                <a:cs typeface="Calibri"/>
+              </a:rPr>
+              <a:t>Simon</a:t>
+            </a:r>
+            <a:endParaRPr lang="en-US">
+              <a:ea typeface="Calibri"/>
+              <a:cs typeface="Calibri"/>
+            </a:endParaRPr>
+          </a:p>
+        </p:txBody>
+      </p:sp>
+      <p:sp>
+        <p:nvSpPr>
+          <p:cNvPr id="4" name="Foliennummernplatzhalter 3"/>
+          <p:cNvSpPr>
+            <a:spLocks noGrp="1"/>
+          </p:cNvSpPr>
+          <p:nvPr>
+            <p:ph type="sldNum" sz="quarter" idx="5"/>
+          </p:nvPr>
+        </p:nvSpPr>
+        <p:spPr/>
+        <p:txBody>
+          <a:bodyPr/>
+          <a:lstStyle/>
+          <a:p>
+            <a:pPr rtl="0"/>
+            <a:fld id="{D4B9A9E5-4F7F-4A7D-9DE1-899232329269}" type="slidenum">
+              <a:rPr lang="de-DE" noProof="0" smtClean="0"/>
+              <a:t>20</a:t>
+            </a:fld>
+            <a:endParaRPr lang="de-DE" noProof="0"/>
+          </a:p>
+        </p:txBody>
+      </p:sp>
+    </p:spTree>
+    <p:extLst>
+      <p:ext uri="{BB962C8B-B14F-4D97-AF65-F5344CB8AC3E}">
+        <p14:creationId xmlns:p14="http://schemas.microsoft.com/office/powerpoint/2010/main" val="2248576669"/>
+      </p:ext>
+    </p:extLst>
+  </p:cSld>
+  <p:clrMapOvr>
+    <a:masterClrMapping/>
+  </p:clrMapOvr>
+</p:notes>
+</file>
+
+<file path=ppt/notesSlides/notesSlide21.xml><?xml version="1.0" encoding="utf-8"?>
+<p:notes xmlns:a="http://schemas.openxmlformats.org/drawingml/2006/main" xmlns:r="http://schemas.openxmlformats.org/officeDocument/2006/relationships" xmlns:p="http://schemas.openxmlformats.org/presentationml/2006/main">
+  <p:cSld>
+    <p:spTree>
+      <p:nvGrpSpPr>
+        <p:cNvPr id="1" name=""/>
+        <p:cNvGrpSpPr/>
+        <p:nvPr/>
+      </p:nvGrpSpPr>
+      <p:grpSpPr>
+        <a:xfrm>
+          <a:off x="0" y="0"/>
+          <a:ext cx="0" cy="0"/>
+          <a:chOff x="0" y="0"/>
+          <a:chExt cx="0" cy="0"/>
+        </a:xfrm>
+      </p:grpSpPr>
+      <p:sp>
+        <p:nvSpPr>
+          <p:cNvPr id="2" name="Folienbildplatzhalter 1"/>
+          <p:cNvSpPr>
+            <a:spLocks noGrp="1" noRot="1" noChangeAspect="1"/>
+          </p:cNvSpPr>
+          <p:nvPr>
+            <p:ph type="sldImg"/>
+          </p:nvPr>
+        </p:nvSpPr>
+        <p:spPr/>
+      </p:sp>
+      <p:sp>
+        <p:nvSpPr>
+          <p:cNvPr id="3" name="Notizenplatzhalter 2"/>
+          <p:cNvSpPr>
+            <a:spLocks noGrp="1"/>
+          </p:cNvSpPr>
+          <p:nvPr>
+            <p:ph type="body" idx="1"/>
+          </p:nvPr>
+        </p:nvSpPr>
+        <p:spPr/>
+        <p:txBody>
+          <a:bodyPr/>
+          <a:lstStyle/>
+          <a:p>
+            <a:r>
               <a:rPr lang="en-US">
                 <a:ea typeface="Calibri"/>
                 <a:cs typeface="Calibri"/>
@@ -2210,7 +1944,7 @@
 </p:notes>
 </file>
 
-<file path=ppt/notesSlides/notesSlide21.xml><?xml version="1.0" encoding="utf-8"?>
+<file path=ppt/notesSlides/notesSlide22.xml><?xml version="1.0" encoding="utf-8"?>
 <p:notes xmlns:a="http://schemas.openxmlformats.org/drawingml/2006/main" xmlns:r="http://schemas.openxmlformats.org/officeDocument/2006/relationships" xmlns:p="http://schemas.openxmlformats.org/presentationml/2006/main">
   <p:cSld>
     <p:spTree>
@@ -2320,97 +2054,6 @@
     <p:extLst>
       <p:ext uri="{BB962C8B-B14F-4D97-AF65-F5344CB8AC3E}">
         <p14:creationId xmlns:p14="http://schemas.microsoft.com/office/powerpoint/2010/main" val="1660897172"/>
-      </p:ext>
-    </p:extLst>
-  </p:cSld>
-  <p:clrMapOvr>
-    <a:masterClrMapping/>
-  </p:clrMapOvr>
-</p:notes>
-</file>
-
-<file path=ppt/notesSlides/notesSlide22.xml><?xml version="1.0" encoding="utf-8"?>
-<p:notes xmlns:a="http://schemas.openxmlformats.org/drawingml/2006/main" xmlns:r="http://schemas.openxmlformats.org/officeDocument/2006/relationships" xmlns:p="http://schemas.openxmlformats.org/presentationml/2006/main">
-  <p:cSld>
-    <p:spTree>
-      <p:nvGrpSpPr>
-        <p:cNvPr id="1" name=""/>
-        <p:cNvGrpSpPr/>
-        <p:nvPr/>
-      </p:nvGrpSpPr>
-      <p:grpSpPr>
-        <a:xfrm>
-          <a:off x="0" y="0"/>
-          <a:ext cx="0" cy="0"/>
-          <a:chOff x="0" y="0"/>
-          <a:chExt cx="0" cy="0"/>
-        </a:xfrm>
-      </p:grpSpPr>
-      <p:sp>
-        <p:nvSpPr>
-          <p:cNvPr id="2" name="Folienbildplatzhalter 1"/>
-          <p:cNvSpPr>
-            <a:spLocks noGrp="1" noRot="1" noChangeAspect="1"/>
-          </p:cNvSpPr>
-          <p:nvPr>
-            <p:ph type="sldImg"/>
-          </p:nvPr>
-        </p:nvSpPr>
-        <p:spPr/>
-      </p:sp>
-      <p:sp>
-        <p:nvSpPr>
-          <p:cNvPr id="3" name="Notizenplatzhalter 2"/>
-          <p:cNvSpPr>
-            <a:spLocks noGrp="1"/>
-          </p:cNvSpPr>
-          <p:nvPr>
-            <p:ph type="body" idx="1"/>
-          </p:nvPr>
-        </p:nvSpPr>
-        <p:spPr/>
-        <p:txBody>
-          <a:bodyPr/>
-          <a:lstStyle/>
-          <a:p>
-            <a:r>
-              <a:rPr lang="en-US">
-                <a:ea typeface="Calibri"/>
-                <a:cs typeface="Calibri"/>
-              </a:rPr>
-              <a:t>Simon</a:t>
-            </a:r>
-          </a:p>
-        </p:txBody>
-      </p:sp>
-      <p:sp>
-        <p:nvSpPr>
-          <p:cNvPr id="4" name="Foliennummernplatzhalter 3"/>
-          <p:cNvSpPr>
-            <a:spLocks noGrp="1"/>
-          </p:cNvSpPr>
-          <p:nvPr>
-            <p:ph type="sldNum" sz="quarter" idx="5"/>
-          </p:nvPr>
-        </p:nvSpPr>
-        <p:spPr/>
-        <p:txBody>
-          <a:bodyPr/>
-          <a:lstStyle/>
-          <a:p>
-            <a:pPr rtl="0"/>
-            <a:fld id="{D4B9A9E5-4F7F-4A7D-9DE1-899232329269}" type="slidenum">
-              <a:rPr lang="de-DE" noProof="0" smtClean="0"/>
-              <a:t>23</a:t>
-            </a:fld>
-            <a:endParaRPr lang="de-DE" noProof="0"/>
-          </a:p>
-        </p:txBody>
-      </p:sp>
-    </p:spTree>
-    <p:extLst>
-      <p:ext uri="{BB962C8B-B14F-4D97-AF65-F5344CB8AC3E}">
-        <p14:creationId xmlns:p14="http://schemas.microsoft.com/office/powerpoint/2010/main" val="3709370663"/>
       </p:ext>
     </p:extLst>
   </p:cSld>
@@ -2465,16 +2108,12 @@
           <a:lstStyle/>
           <a:p>
             <a:r>
-              <a:rPr lang="de-DE">
+              <a:rPr lang="en-US">
                 <a:ea typeface="Calibri"/>
                 <a:cs typeface="Calibri"/>
               </a:rPr>
               <a:t>Simon</a:t>
             </a:r>
-            <a:endParaRPr lang="en-US">
-              <a:ea typeface="Calibri"/>
-              <a:cs typeface="Calibri"/>
-            </a:endParaRPr>
           </a:p>
         </p:txBody>
       </p:sp>
@@ -2496,7 +2135,7 @@
             <a:pPr rtl="0"/>
             <a:fld id="{D4B9A9E5-4F7F-4A7D-9DE1-899232329269}" type="slidenum">
               <a:rPr lang="de-DE" noProof="0" smtClean="0"/>
-              <a:t>24</a:t>
+              <a:t>23</a:t>
             </a:fld>
             <a:endParaRPr lang="de-DE" noProof="0"/>
           </a:p>
@@ -2505,7 +2144,7 @@
     </p:spTree>
     <p:extLst>
       <p:ext uri="{BB962C8B-B14F-4D97-AF65-F5344CB8AC3E}">
-        <p14:creationId xmlns:p14="http://schemas.microsoft.com/office/powerpoint/2010/main" val="260397688"/>
+        <p14:creationId xmlns:p14="http://schemas.microsoft.com/office/powerpoint/2010/main" val="3709370663"/>
       </p:ext>
     </p:extLst>
   </p:cSld>
@@ -2560,12 +2199,16 @@
           <a:lstStyle/>
           <a:p>
             <a:r>
-              <a:rPr lang="en-US">
+              <a:rPr lang="de-DE">
                 <a:ea typeface="Calibri"/>
                 <a:cs typeface="Calibri"/>
               </a:rPr>
               <a:t>Simon</a:t>
             </a:r>
+            <a:endParaRPr lang="en-US">
+              <a:ea typeface="Calibri"/>
+              <a:cs typeface="Calibri"/>
+            </a:endParaRPr>
           </a:p>
         </p:txBody>
       </p:sp>
@@ -2587,7 +2230,7 @@
             <a:pPr rtl="0"/>
             <a:fld id="{D4B9A9E5-4F7F-4A7D-9DE1-899232329269}" type="slidenum">
               <a:rPr lang="de-DE" noProof="0" smtClean="0"/>
-              <a:t>25</a:t>
+              <a:t>24</a:t>
             </a:fld>
             <a:endParaRPr lang="de-DE" noProof="0"/>
           </a:p>
@@ -2596,7 +2239,7 @@
     </p:spTree>
     <p:extLst>
       <p:ext uri="{BB962C8B-B14F-4D97-AF65-F5344CB8AC3E}">
-        <p14:creationId xmlns:p14="http://schemas.microsoft.com/office/powerpoint/2010/main" val="1838846270"/>
+        <p14:creationId xmlns:p14="http://schemas.microsoft.com/office/powerpoint/2010/main" val="260397688"/>
       </p:ext>
     </p:extLst>
   </p:cSld>
@@ -2647,22 +2290,103 @@
         </p:nvSpPr>
         <p:spPr/>
         <p:txBody>
-          <a:bodyPr rtlCol="0"/>
-          <a:lstStyle/>
-          <a:p>
-            <a:r>
-              <a:rPr lang="de-DE">
+          <a:bodyPr/>
+          <a:lstStyle/>
+          <a:p>
+            <a:r>
+              <a:rPr lang="en-US">
                 <a:ea typeface="Calibri"/>
                 <a:cs typeface="Calibri"/>
               </a:rPr>
-              <a:t>Alle zusammen, Hand in Hand ;)</a:t>
-            </a:r>
-            <a:endParaRPr lang="de-DE"/>
-          </a:p>
+              <a:t>Simon</a:t>
+            </a:r>
+          </a:p>
+        </p:txBody>
+      </p:sp>
+      <p:sp>
+        <p:nvSpPr>
+          <p:cNvPr id="4" name="Foliennummernplatzhalter 3"/>
+          <p:cNvSpPr>
+            <a:spLocks noGrp="1"/>
+          </p:cNvSpPr>
+          <p:nvPr>
+            <p:ph type="sldNum" sz="quarter" idx="5"/>
+          </p:nvPr>
+        </p:nvSpPr>
+        <p:spPr/>
+        <p:txBody>
+          <a:bodyPr/>
+          <a:lstStyle/>
+          <a:p>
+            <a:pPr rtl="0"/>
+            <a:fld id="{D4B9A9E5-4F7F-4A7D-9DE1-899232329269}" type="slidenum">
+              <a:rPr lang="de-DE" noProof="0" smtClean="0"/>
+              <a:t>25</a:t>
+            </a:fld>
+            <a:endParaRPr lang="de-DE" noProof="0"/>
+          </a:p>
+        </p:txBody>
+      </p:sp>
+    </p:spTree>
+    <p:extLst>
+      <p:ext uri="{BB962C8B-B14F-4D97-AF65-F5344CB8AC3E}">
+        <p14:creationId xmlns:p14="http://schemas.microsoft.com/office/powerpoint/2010/main" val="1838846270"/>
+      </p:ext>
+    </p:extLst>
+  </p:cSld>
+  <p:clrMapOvr>
+    <a:masterClrMapping/>
+  </p:clrMapOvr>
+</p:notes>
+</file>
+
+<file path=ppt/notesSlides/notesSlide26.xml><?xml version="1.0" encoding="utf-8"?>
+<p:notes xmlns:a="http://schemas.openxmlformats.org/drawingml/2006/main" xmlns:r="http://schemas.openxmlformats.org/officeDocument/2006/relationships" xmlns:p="http://schemas.openxmlformats.org/presentationml/2006/main">
+  <p:cSld>
+    <p:spTree>
+      <p:nvGrpSpPr>
+        <p:cNvPr id="1" name=""/>
+        <p:cNvGrpSpPr/>
+        <p:nvPr/>
+      </p:nvGrpSpPr>
+      <p:grpSpPr>
+        <a:xfrm>
+          <a:off x="0" y="0"/>
+          <a:ext cx="0" cy="0"/>
+          <a:chOff x="0" y="0"/>
+          <a:chExt cx="0" cy="0"/>
+        </a:xfrm>
+      </p:grpSpPr>
+      <p:sp>
+        <p:nvSpPr>
+          <p:cNvPr id="2" name="Folienbildplatzhalter 1"/>
+          <p:cNvSpPr>
+            <a:spLocks noGrp="1" noRot="1" noChangeAspect="1"/>
+          </p:cNvSpPr>
+          <p:nvPr>
+            <p:ph type="sldImg"/>
+          </p:nvPr>
+        </p:nvSpPr>
+        <p:spPr/>
+      </p:sp>
+      <p:sp>
+        <p:nvSpPr>
+          <p:cNvPr id="3" name="Notizenplatzhalter 2"/>
+          <p:cNvSpPr>
+            <a:spLocks noGrp="1"/>
+          </p:cNvSpPr>
+          <p:nvPr>
+            <p:ph type="body" idx="1"/>
+          </p:nvPr>
+        </p:nvSpPr>
+        <p:spPr/>
+        <p:txBody>
+          <a:bodyPr rtlCol="0"/>
+          <a:lstStyle/>
           <a:p>
             <a:r>
               <a:rPr lang="de-DE"/>
-              <a:t>🤝🏼</a:t>
+              <a:t>Simon</a:t>
             </a:r>
           </a:p>
         </p:txBody>
@@ -3532,7 +3256,7 @@
           <a:p>
             <a:fld id="{D5A9FCBC-F132-4AAE-AF84-F52F3E0CA57D}" type="datetime1">
               <a:rPr lang="de-DE" smtClean="0"/>
-              <a:t>02.06.2026</a:t>
+              <a:t>03.06.2026</a:t>
             </a:fld>
             <a:endParaRPr lang="en-US"/>
           </a:p>
@@ -4038,7 +3762,7 @@
           <a:p>
             <a:fld id="{D5A9FCBC-F132-4AAE-AF84-F52F3E0CA57D}" type="datetime1">
               <a:rPr lang="de-DE" smtClean="0"/>
-              <a:t>02.06.2026</a:t>
+              <a:t>03.06.2026</a:t>
             </a:fld>
             <a:endParaRPr lang="en-US"/>
           </a:p>
@@ -4479,7 +4203,7 @@
             <a:pPr rtl="0"/>
             <a:fld id="{A2AF1D79-55E0-449A-9E71-306971139423}" type="datetime1">
               <a:rPr lang="de-DE" noProof="0" smtClean="0"/>
-              <a:t>02.06.2026</a:t>
+              <a:t>03.06.2026</a:t>
             </a:fld>
             <a:endParaRPr lang="de-DE" noProof="0"/>
           </a:p>
@@ -4784,7 +4508,7 @@
             <a:fld id="{797C2BE3-76C9-4662-9010-556118ECBB0B}" type="datetime1">
               <a:rPr lang="de-DE" smtClean="0"/>
               <a:pPr/>
-              <a:t>02.06.2026</a:t>
+              <a:t>03.06.2026</a:t>
             </a:fld>
             <a:endParaRPr lang="de-DE"/>
           </a:p>
@@ -5143,7 +4867,7 @@
             <a:fld id="{797C2BE3-76C9-4662-9010-556118ECBB0B}" type="datetime1">
               <a:rPr lang="de-DE" smtClean="0"/>
               <a:pPr/>
-              <a:t>02.06.2026</a:t>
+              <a:t>03.06.2026</a:t>
             </a:fld>
             <a:endParaRPr lang="de-DE"/>
           </a:p>
@@ -5609,7 +5333,7 @@
             <a:pPr rtl="0"/>
             <a:fld id="{CA628670-5097-4685-AD8D-4E14E3E8F3C5}" type="datetime1">
               <a:rPr lang="de-DE" noProof="0" smtClean="0"/>
-              <a:t>02.06.2026</a:t>
+              <a:t>03.06.2026</a:t>
             </a:fld>
             <a:endParaRPr lang="de-DE" noProof="0"/>
           </a:p>
@@ -6164,10 +5888,10 @@
           <a:p>
             <a:pPr rtl="0"/>
             <a:r>
-              <a:rPr lang="de-DE" sz="8000" err="1"/>
+              <a:rPr lang="de-DE" sz="8000" b="1" err="1"/>
               <a:t>BitFlow</a:t>
             </a:r>
-            <a:endParaRPr lang="de-DE" sz="6000"/>
+            <a:endParaRPr lang="de-DE" sz="6000" b="1"/>
           </a:p>
         </p:txBody>
       </p:sp>
@@ -6388,7 +6112,21 @@
               <a:p>
                 <a:r>
                   <a:rPr lang="de-DE"/>
-                  <a:t>Test-Deploy startet Container</a:t>
+                  <a:t>Test-Deploy </a:t>
+                </a:r>
+              </a:p>
+              <a:p>
+                <a:pPr lvl="1"/>
+                <a:r>
+                  <a:rPr lang="de-DE"/>
+                  <a:t>eigene Container + Netzwerk</a:t>
+                </a:r>
+              </a:p>
+              <a:p>
+                <a:pPr lvl="1"/>
+                <a:r>
+                  <a:rPr lang="de-DE"/>
+                  <a:t>Health-Check (Backend)</a:t>
                 </a:r>
               </a:p>
               <a:p>
@@ -6430,10 +6168,6 @@
               </a:p>
               <a:p>
                 <a:pPr lvl="1"/>
-                <a:r>
-                  <a:rPr lang="de-DE"/>
-                  <a:t>https: </a:t>
-                </a:r>
                 <a:r>
                   <a:rPr lang="de-DE" err="1"/>
                   <a:t>Let‘s</a:t>
@@ -6484,7 +6218,7 @@
               <a:lstStyle/>
               <a:p>
                 <a:r>
-                  <a:rPr lang="de-DE">
+                  <a:rPr lang="en-US">
                     <a:noFill/>
                   </a:rPr>
                   <a:t> </a:t>
@@ -6518,7 +6252,7 @@
             <a:fld id="{797C2BE3-76C9-4662-9010-556118ECBB0B}" type="datetime1">
               <a:rPr lang="de-DE" smtClean="0"/>
               <a:pPr/>
-              <a:t>02.06.2026</a:t>
+              <a:t>03.06.2026</a:t>
             </a:fld>
             <a:endParaRPr lang="de-DE"/>
           </a:p>
@@ -6617,7 +6351,7 @@
           <p:cNvPr id="2" name="Titel 1">
             <a:extLst>
               <a:ext uri="{FF2B5EF4-FFF2-40B4-BE49-F238E27FC236}">
-                <a16:creationId xmlns:a16="http://schemas.microsoft.com/office/drawing/2014/main" id="{AF802FD4-841B-8FA4-BD40-984906A39C33}"/>
+                <a16:creationId xmlns:a16="http://schemas.microsoft.com/office/drawing/2014/main" id="{DC9AF0AF-360D-4F17-8C0D-C13A78A59527}"/>
               </a:ext>
             </a:extLst>
           </p:cNvPr>
@@ -6634,7 +6368,7 @@
           <a:lstStyle/>
           <a:p>
             <a:r>
-              <a:rPr lang="de-DE" dirty="0"/>
+              <a:rPr lang="de-DE"/>
               <a:t>Live Demonstration</a:t>
             </a:r>
           </a:p>
@@ -6645,7 +6379,7 @@
           <p:cNvPr id="3" name="Textplatzhalter 2">
             <a:extLst>
               <a:ext uri="{FF2B5EF4-FFF2-40B4-BE49-F238E27FC236}">
-                <a16:creationId xmlns:a16="http://schemas.microsoft.com/office/drawing/2014/main" id="{1728F632-E6A1-C557-CA8A-AD15FBBFD7B9}"/>
+                <a16:creationId xmlns:a16="http://schemas.microsoft.com/office/drawing/2014/main" id="{05E2054D-57CA-4D2C-B6D9-F12C51C7A458}"/>
               </a:ext>
             </a:extLst>
           </p:cNvPr>
@@ -6670,7 +6404,7 @@
           <p:cNvPr id="4" name="Datumsplatzhalter 3">
             <a:extLst>
               <a:ext uri="{FF2B5EF4-FFF2-40B4-BE49-F238E27FC236}">
-                <a16:creationId xmlns:a16="http://schemas.microsoft.com/office/drawing/2014/main" id="{54DD1A77-951A-E41F-9028-517980453DFE}"/>
+                <a16:creationId xmlns:a16="http://schemas.microsoft.com/office/drawing/2014/main" id="{0D50C65F-126C-4334-BDCC-BD3F2999063C}"/>
               </a:ext>
             </a:extLst>
           </p:cNvPr>
@@ -6689,7 +6423,7 @@
             <a:fld id="{797C2BE3-76C9-4662-9010-556118ECBB0B}" type="datetime1">
               <a:rPr lang="de-DE" smtClean="0"/>
               <a:pPr/>
-              <a:t>02.06.2026</a:t>
+              <a:t>03.06.2026</a:t>
             </a:fld>
             <a:endParaRPr lang="de-DE"/>
           </a:p>
@@ -6700,7 +6434,7 @@
           <p:cNvPr id="5" name="Fußzeilenplatzhalter 4">
             <a:extLst>
               <a:ext uri="{FF2B5EF4-FFF2-40B4-BE49-F238E27FC236}">
-                <a16:creationId xmlns:a16="http://schemas.microsoft.com/office/drawing/2014/main" id="{99034BF6-092E-8DB6-E685-7FD0FBCF6A47}"/>
+                <a16:creationId xmlns:a16="http://schemas.microsoft.com/office/drawing/2014/main" id="{5A4598D1-34BB-49E6-947C-649D35834915}"/>
               </a:ext>
             </a:extLst>
           </p:cNvPr>
@@ -6728,7 +6462,7 @@
           <p:cNvPr id="6" name="Foliennummernplatzhalter 5">
             <a:extLst>
               <a:ext uri="{FF2B5EF4-FFF2-40B4-BE49-F238E27FC236}">
-                <a16:creationId xmlns:a16="http://schemas.microsoft.com/office/drawing/2014/main" id="{9695C65B-88EC-FF33-412B-FB771A61E5A5}"/>
+                <a16:creationId xmlns:a16="http://schemas.microsoft.com/office/drawing/2014/main" id="{B1048FAF-73B5-4068-9EBF-48FCA1FFE0E8}"/>
               </a:ext>
             </a:extLst>
           </p:cNvPr>
@@ -6755,10 +6489,10 @@
       </p:sp>
       <p:pic>
         <p:nvPicPr>
-          <p:cNvPr id="7" name="Grafik 6">
-            <a:extLst>
-              <a:ext uri="{FF2B5EF4-FFF2-40B4-BE49-F238E27FC236}">
-                <a16:creationId xmlns:a16="http://schemas.microsoft.com/office/drawing/2014/main" id="{AAB9AAB7-AD70-847A-31BF-D057A0F91452}"/>
+          <p:cNvPr id="8" name="Grafik 7">
+            <a:extLst>
+              <a:ext uri="{FF2B5EF4-FFF2-40B4-BE49-F238E27FC236}">
+                <a16:creationId xmlns:a16="http://schemas.microsoft.com/office/drawing/2014/main" id="{3F44B9F4-DD9F-EF36-99BC-AA8D8034D52D}"/>
               </a:ext>
             </a:extLst>
           </p:cNvPr>
@@ -6768,10 +6502,10 @@
           <p:nvPr/>
         </p:nvPicPr>
         <p:blipFill>
-          <a:blip r:embed="rId2">
+          <a:blip r:embed="rId3">
             <a:extLst>
               <a:ext uri="{96DAC541-7B7A-43D3-8B79-37D633B846F1}">
-                <asvg:svgBlip xmlns:asvg="http://schemas.microsoft.com/office/drawing/2016/SVG/main" r:embed="rId3"/>
+                <asvg:svgBlip xmlns:asvg="http://schemas.microsoft.com/office/drawing/2016/SVG/main" r:embed="rId4"/>
               </a:ext>
             </a:extLst>
           </a:blip>
@@ -6781,8 +6515,8 @@
         </p:blipFill>
         <p:spPr>
           <a:xfrm>
-            <a:off x="3832398" y="1879600"/>
-            <a:ext cx="3098800" cy="3098800"/>
+            <a:off x="4608952" y="2272826"/>
+            <a:ext cx="2958126" cy="2946219"/>
           </a:xfrm>
           <a:prstGeom prst="rect">
             <a:avLst/>
@@ -6792,7 +6526,7 @@
     </p:spTree>
     <p:extLst>
       <p:ext uri="{BB962C8B-B14F-4D97-AF65-F5344CB8AC3E}">
-        <p14:creationId xmlns:p14="http://schemas.microsoft.com/office/powerpoint/2010/main" val="2959916757"/>
+        <p14:creationId xmlns:p14="http://schemas.microsoft.com/office/powerpoint/2010/main" val="3773242269"/>
       </p:ext>
     </p:extLst>
   </p:cSld>
@@ -6849,31 +6583,6 @@
       </p:sp>
       <p:sp>
         <p:nvSpPr>
-          <p:cNvPr id="3" name="Textplatzhalter 2">
-            <a:extLst>
-              <a:ext uri="{FF2B5EF4-FFF2-40B4-BE49-F238E27FC236}">
-                <a16:creationId xmlns:a16="http://schemas.microsoft.com/office/drawing/2014/main" id="{05E2054D-57CA-4D2C-B6D9-F12C51C7A458}"/>
-              </a:ext>
-            </a:extLst>
-          </p:cNvPr>
-          <p:cNvSpPr>
-            <a:spLocks noGrp="1"/>
-          </p:cNvSpPr>
-          <p:nvPr>
-            <p:ph type="body" sz="quarter" idx="15"/>
-          </p:nvPr>
-        </p:nvSpPr>
-        <p:spPr/>
-        <p:txBody>
-          <a:bodyPr/>
-          <a:lstStyle/>
-          <a:p>
-            <a:endParaRPr lang="de-DE" dirty="0"/>
-          </a:p>
-        </p:txBody>
-      </p:sp>
-      <p:sp>
-        <p:nvSpPr>
           <p:cNvPr id="4" name="Datumsplatzhalter 3">
             <a:extLst>
               <a:ext uri="{FF2B5EF4-FFF2-40B4-BE49-F238E27FC236}">
@@ -6896,7 +6605,7 @@
             <a:fld id="{797C2BE3-76C9-4662-9010-556118ECBB0B}" type="datetime1">
               <a:rPr lang="de-DE" smtClean="0"/>
               <a:pPr/>
-              <a:t>02.06.2026</a:t>
+              <a:t>03.06.2026</a:t>
             </a:fld>
             <a:endParaRPr lang="de-DE"/>
           </a:p>
@@ -6965,7 +6674,7 @@
           <p:cNvPr id="9" name="Grafik 8">
             <a:extLst>
               <a:ext uri="{FF2B5EF4-FFF2-40B4-BE49-F238E27FC236}">
-                <a16:creationId xmlns:a16="http://schemas.microsoft.com/office/drawing/2014/main" id="{A9336AD1-60BB-3EAC-02A8-8097A417FA5F}"/>
+                <a16:creationId xmlns:a16="http://schemas.microsoft.com/office/drawing/2014/main" id="{737F3D0D-76DE-4C94-9AC4-2EE317B2784E}"/>
               </a:ext>
             </a:extLst>
           </p:cNvPr>
@@ -6982,8 +6691,8 @@
         </p:blipFill>
         <p:spPr>
           <a:xfrm>
-            <a:off x="673142" y="1486353"/>
-            <a:ext cx="5422858" cy="3857624"/>
+            <a:off x="6515100" y="2169155"/>
+            <a:ext cx="4191000" cy="2981325"/>
           </a:xfrm>
           <a:prstGeom prst="rect">
             <a:avLst/>
@@ -6992,10 +6701,10 @@
       </p:pic>
       <p:pic>
         <p:nvPicPr>
-          <p:cNvPr id="26" name="Grafik 25">
-            <a:extLst>
-              <a:ext uri="{FF2B5EF4-FFF2-40B4-BE49-F238E27FC236}">
-                <a16:creationId xmlns:a16="http://schemas.microsoft.com/office/drawing/2014/main" id="{5B7F3923-5098-4EDC-195A-FE797428D12E}"/>
+          <p:cNvPr id="11" name="Grafik 10">
+            <a:extLst>
+              <a:ext uri="{FF2B5EF4-FFF2-40B4-BE49-F238E27FC236}">
+                <a16:creationId xmlns:a16="http://schemas.microsoft.com/office/drawing/2014/main" id="{8A787837-14D4-4F45-A94C-0E93BDD70FAF}"/>
               </a:ext>
             </a:extLst>
           </p:cNvPr>
@@ -7012,7 +6721,7 @@
         </p:blipFill>
         <p:spPr>
           <a:xfrm>
-            <a:off x="6667500" y="1458745"/>
+            <a:off x="1485900" y="1731004"/>
             <a:ext cx="4191000" cy="3857625"/>
           </a:xfrm>
           <a:prstGeom prst="rect">
@@ -7023,7 +6732,7 @@
     </p:spTree>
     <p:extLst>
       <p:ext uri="{BB962C8B-B14F-4D97-AF65-F5344CB8AC3E}">
-        <p14:creationId xmlns:p14="http://schemas.microsoft.com/office/powerpoint/2010/main" val="3773242269"/>
+        <p14:creationId xmlns:p14="http://schemas.microsoft.com/office/powerpoint/2010/main" val="35567276"/>
       </p:ext>
     </p:extLst>
   </p:cSld>
@@ -7073,33 +6782,8 @@
           <a:p>
             <a:r>
               <a:rPr lang="de-DE" dirty="0" err="1"/>
-              <a:t>Darkmode</a:t>
-            </a:r>
-            <a:endParaRPr lang="de-DE" dirty="0"/>
-          </a:p>
-        </p:txBody>
-      </p:sp>
-      <p:sp>
-        <p:nvSpPr>
-          <p:cNvPr id="3" name="Textplatzhalter 2">
-            <a:extLst>
-              <a:ext uri="{FF2B5EF4-FFF2-40B4-BE49-F238E27FC236}">
-                <a16:creationId xmlns:a16="http://schemas.microsoft.com/office/drawing/2014/main" id="{05E2054D-57CA-4D2C-B6D9-F12C51C7A458}"/>
-              </a:ext>
-            </a:extLst>
-          </p:cNvPr>
-          <p:cNvSpPr>
-            <a:spLocks noGrp="1"/>
-          </p:cNvSpPr>
-          <p:nvPr>
-            <p:ph type="body" sz="quarter" idx="15"/>
-          </p:nvPr>
-        </p:nvSpPr>
-        <p:spPr/>
-        <p:txBody>
-          <a:bodyPr/>
-          <a:lstStyle/>
-          <a:p>
+              <a:t>DarkMode</a:t>
+            </a:r>
             <a:endParaRPr lang="de-DE" dirty="0"/>
           </a:p>
         </p:txBody>
@@ -7128,7 +6812,7 @@
             <a:fld id="{797C2BE3-76C9-4662-9010-556118ECBB0B}" type="datetime1">
               <a:rPr lang="de-DE" smtClean="0"/>
               <a:pPr/>
-              <a:t>02.06.2026</a:t>
+              <a:t>03.06.2026</a:t>
             </a:fld>
             <a:endParaRPr lang="de-DE"/>
           </a:p>
@@ -7194,10 +6878,10 @@
       </p:sp>
       <p:pic>
         <p:nvPicPr>
-          <p:cNvPr id="17" name="Grafik 16">
-            <a:extLst>
-              <a:ext uri="{FF2B5EF4-FFF2-40B4-BE49-F238E27FC236}">
-                <a16:creationId xmlns:a16="http://schemas.microsoft.com/office/drawing/2014/main" id="{5E888108-1513-04ED-84A3-E1D7324F14C0}"/>
+          <p:cNvPr id="7" name="Grafik 6">
+            <a:extLst>
+              <a:ext uri="{FF2B5EF4-FFF2-40B4-BE49-F238E27FC236}">
+                <a16:creationId xmlns:a16="http://schemas.microsoft.com/office/drawing/2014/main" id="{7096BCCA-6641-4110-AC44-33F551C7E281}"/>
               </a:ext>
             </a:extLst>
           </p:cNvPr>
@@ -7214,8 +6898,8 @@
         </p:blipFill>
         <p:spPr>
           <a:xfrm>
-            <a:off x="879648" y="1648934"/>
-            <a:ext cx="9004300" cy="4517227"/>
+            <a:off x="1228898" y="1382963"/>
+            <a:ext cx="9692726" cy="4862593"/>
           </a:xfrm>
           <a:prstGeom prst="rect">
             <a:avLst/>
@@ -7225,7 +6909,7 @@
     </p:spTree>
     <p:extLst>
       <p:ext uri="{BB962C8B-B14F-4D97-AF65-F5344CB8AC3E}">
-        <p14:creationId xmlns:p14="http://schemas.microsoft.com/office/powerpoint/2010/main" val="1070252717"/>
+        <p14:creationId xmlns:p14="http://schemas.microsoft.com/office/powerpoint/2010/main" val="625556704"/>
       </p:ext>
     </p:extLst>
   </p:cSld>
@@ -7275,33 +6959,8 @@
           <a:p>
             <a:r>
               <a:rPr lang="de-DE" dirty="0"/>
-              <a:t>Custom Gates</a:t>
-            </a:r>
-          </a:p>
-        </p:txBody>
-      </p:sp>
-      <p:sp>
-        <p:nvSpPr>
-          <p:cNvPr id="3" name="Textplatzhalter 2">
-            <a:extLst>
-              <a:ext uri="{FF2B5EF4-FFF2-40B4-BE49-F238E27FC236}">
-                <a16:creationId xmlns:a16="http://schemas.microsoft.com/office/drawing/2014/main" id="{05E2054D-57CA-4D2C-B6D9-F12C51C7A458}"/>
-              </a:ext>
-            </a:extLst>
-          </p:cNvPr>
-          <p:cNvSpPr>
-            <a:spLocks noGrp="1"/>
-          </p:cNvSpPr>
-          <p:nvPr>
-            <p:ph type="body" sz="quarter" idx="15"/>
-          </p:nvPr>
-        </p:nvSpPr>
-        <p:spPr/>
-        <p:txBody>
-          <a:bodyPr/>
-          <a:lstStyle/>
-          <a:p>
-            <a:endParaRPr lang="de-DE" dirty="0"/>
+              <a:t>Custom Gatter</a:t>
+            </a:r>
           </a:p>
         </p:txBody>
       </p:sp>
@@ -7329,7 +6988,7 @@
             <a:fld id="{797C2BE3-76C9-4662-9010-556118ECBB0B}" type="datetime1">
               <a:rPr lang="de-DE" smtClean="0"/>
               <a:pPr/>
-              <a:t>02.06.2026</a:t>
+              <a:t>03.06.2026</a:t>
             </a:fld>
             <a:endParaRPr lang="de-DE"/>
           </a:p>
@@ -7395,10 +7054,10 @@
       </p:sp>
       <p:pic>
         <p:nvPicPr>
-          <p:cNvPr id="11" name="Grafik 10">
-            <a:extLst>
-              <a:ext uri="{FF2B5EF4-FFF2-40B4-BE49-F238E27FC236}">
-                <a16:creationId xmlns:a16="http://schemas.microsoft.com/office/drawing/2014/main" id="{AAFF9B9A-6C10-F4C7-9633-370014A3F565}"/>
+          <p:cNvPr id="7" name="Grafik 6">
+            <a:extLst>
+              <a:ext uri="{FF2B5EF4-FFF2-40B4-BE49-F238E27FC236}">
+                <a16:creationId xmlns:a16="http://schemas.microsoft.com/office/drawing/2014/main" id="{B8BDE8DC-EE3B-4B00-A2B3-0E5BD1C8628E}"/>
               </a:ext>
             </a:extLst>
           </p:cNvPr>
@@ -7415,8 +7074,8 @@
         </p:blipFill>
         <p:spPr>
           <a:xfrm>
-            <a:off x="1583632" y="1440330"/>
-            <a:ext cx="7596331" cy="4916020"/>
+            <a:off x="1228899" y="1458745"/>
+            <a:ext cx="7381702" cy="4777121"/>
           </a:xfrm>
           <a:prstGeom prst="rect">
             <a:avLst/>
@@ -7426,7 +7085,7 @@
     </p:spTree>
     <p:extLst>
       <p:ext uri="{BB962C8B-B14F-4D97-AF65-F5344CB8AC3E}">
-        <p14:creationId xmlns:p14="http://schemas.microsoft.com/office/powerpoint/2010/main" val="3623430650"/>
+        <p14:creationId xmlns:p14="http://schemas.microsoft.com/office/powerpoint/2010/main" val="2124858347"/>
       </p:ext>
     </p:extLst>
   </p:cSld>
@@ -7476,33 +7135,8 @@
           <a:p>
             <a:r>
               <a:rPr lang="de-DE" dirty="0"/>
-              <a:t>Custom Gates Importieren</a:t>
-            </a:r>
-          </a:p>
-        </p:txBody>
-      </p:sp>
-      <p:sp>
-        <p:nvSpPr>
-          <p:cNvPr id="3" name="Textplatzhalter 2">
-            <a:extLst>
-              <a:ext uri="{FF2B5EF4-FFF2-40B4-BE49-F238E27FC236}">
-                <a16:creationId xmlns:a16="http://schemas.microsoft.com/office/drawing/2014/main" id="{05E2054D-57CA-4D2C-B6D9-F12C51C7A458}"/>
-              </a:ext>
-            </a:extLst>
-          </p:cNvPr>
-          <p:cNvSpPr>
-            <a:spLocks noGrp="1"/>
-          </p:cNvSpPr>
-          <p:nvPr>
-            <p:ph type="body" sz="quarter" idx="15"/>
-          </p:nvPr>
-        </p:nvSpPr>
-        <p:spPr/>
-        <p:txBody>
-          <a:bodyPr/>
-          <a:lstStyle/>
-          <a:p>
-            <a:endParaRPr lang="de-DE" dirty="0"/>
+              <a:t>Custom Gatter importieren</a:t>
+            </a:r>
           </a:p>
         </p:txBody>
       </p:sp>
@@ -7530,7 +7164,7 @@
             <a:fld id="{797C2BE3-76C9-4662-9010-556118ECBB0B}" type="datetime1">
               <a:rPr lang="de-DE" smtClean="0"/>
               <a:pPr/>
-              <a:t>02.06.2026</a:t>
+              <a:t>03.06.2026</a:t>
             </a:fld>
             <a:endParaRPr lang="de-DE"/>
           </a:p>
@@ -7596,10 +7230,10 @@
       </p:sp>
       <p:pic>
         <p:nvPicPr>
-          <p:cNvPr id="15" name="Grafik 14">
-            <a:extLst>
-              <a:ext uri="{FF2B5EF4-FFF2-40B4-BE49-F238E27FC236}">
-                <a16:creationId xmlns:a16="http://schemas.microsoft.com/office/drawing/2014/main" id="{A7D2CFC1-F213-D157-2BF8-E9ABD8AA49BC}"/>
+          <p:cNvPr id="7" name="Grafik 6">
+            <a:extLst>
+              <a:ext uri="{FF2B5EF4-FFF2-40B4-BE49-F238E27FC236}">
+                <a16:creationId xmlns:a16="http://schemas.microsoft.com/office/drawing/2014/main" id="{B8EF17DD-08D1-40ED-85AA-5790614BF77D}"/>
               </a:ext>
             </a:extLst>
           </p:cNvPr>
@@ -7616,7 +7250,7 @@
         </p:blipFill>
         <p:spPr>
           <a:xfrm>
-            <a:off x="1609038" y="1646438"/>
+            <a:off x="1228898" y="1458745"/>
             <a:ext cx="7545519" cy="4471419"/>
           </a:xfrm>
           <a:prstGeom prst="rect">
@@ -7627,7 +7261,7 @@
     </p:spTree>
     <p:extLst>
       <p:ext uri="{BB962C8B-B14F-4D97-AF65-F5344CB8AC3E}">
-        <p14:creationId xmlns:p14="http://schemas.microsoft.com/office/powerpoint/2010/main" val="1829737188"/>
+        <p14:creationId xmlns:p14="http://schemas.microsoft.com/office/powerpoint/2010/main" val="3647238785"/>
       </p:ext>
     </p:extLst>
   </p:cSld>
@@ -7676,34 +7310,9 @@
           <a:lstStyle/>
           <a:p>
             <a:r>
-              <a:rPr lang="de-DE"/>
-              <a:t>Live Demonstration</a:t>
-            </a:r>
-          </a:p>
-        </p:txBody>
-      </p:sp>
-      <p:sp>
-        <p:nvSpPr>
-          <p:cNvPr id="3" name="Textplatzhalter 2">
-            <a:extLst>
-              <a:ext uri="{FF2B5EF4-FFF2-40B4-BE49-F238E27FC236}">
-                <a16:creationId xmlns:a16="http://schemas.microsoft.com/office/drawing/2014/main" id="{05E2054D-57CA-4D2C-B6D9-F12C51C7A458}"/>
-              </a:ext>
-            </a:extLst>
-          </p:cNvPr>
-          <p:cNvSpPr>
-            <a:spLocks noGrp="1"/>
-          </p:cNvSpPr>
-          <p:nvPr>
-            <p:ph type="body" sz="quarter" idx="15"/>
-          </p:nvPr>
-        </p:nvSpPr>
-        <p:spPr/>
-        <p:txBody>
-          <a:bodyPr/>
-          <a:lstStyle/>
-          <a:p>
-            <a:endParaRPr lang="de-DE" dirty="0"/>
+              <a:rPr lang="de-DE" dirty="0"/>
+              <a:t>Custom Gatter</a:t>
+            </a:r>
           </a:p>
         </p:txBody>
       </p:sp>
@@ -7731,7 +7340,7 @@
             <a:fld id="{797C2BE3-76C9-4662-9010-556118ECBB0B}" type="datetime1">
               <a:rPr lang="de-DE" smtClean="0"/>
               <a:pPr/>
-              <a:t>02.06.2026</a:t>
+              <a:t>03.06.2026</a:t>
             </a:fld>
             <a:endParaRPr lang="de-DE"/>
           </a:p>
@@ -7797,10 +7406,10 @@
       </p:sp>
       <p:pic>
         <p:nvPicPr>
-          <p:cNvPr id="13" name="Grafik 12">
-            <a:extLst>
-              <a:ext uri="{FF2B5EF4-FFF2-40B4-BE49-F238E27FC236}">
-                <a16:creationId xmlns:a16="http://schemas.microsoft.com/office/drawing/2014/main" id="{E86C99DC-8AFE-80E6-1B66-DD224EEE538B}"/>
+          <p:cNvPr id="7" name="Grafik 6">
+            <a:extLst>
+              <a:ext uri="{FF2B5EF4-FFF2-40B4-BE49-F238E27FC236}">
+                <a16:creationId xmlns:a16="http://schemas.microsoft.com/office/drawing/2014/main" id="{9734C9EC-BB40-4A66-8756-3478E2D92F20}"/>
               </a:ext>
             </a:extLst>
           </p:cNvPr>
@@ -7817,8 +7426,8 @@
         </p:blipFill>
         <p:spPr>
           <a:xfrm>
-            <a:off x="1501064" y="2514258"/>
-            <a:ext cx="7761468" cy="2997883"/>
+            <a:off x="1228898" y="2134244"/>
+            <a:ext cx="8448833" cy="3263379"/>
           </a:xfrm>
           <a:prstGeom prst="rect">
             <a:avLst/>
@@ -7828,7 +7437,7 @@
     </p:spTree>
     <p:extLst>
       <p:ext uri="{BB962C8B-B14F-4D97-AF65-F5344CB8AC3E}">
-        <p14:creationId xmlns:p14="http://schemas.microsoft.com/office/powerpoint/2010/main" val="471525067"/>
+        <p14:creationId xmlns:p14="http://schemas.microsoft.com/office/powerpoint/2010/main" val="594911899"/>
       </p:ext>
     </p:extLst>
   </p:cSld>
@@ -7877,38 +7486,9 @@
           <a:lstStyle/>
           <a:p>
             <a:r>
-              <a:rPr lang="de-DE" dirty="0" err="1"/>
-              <a:t>Generic</a:t>
-            </a:r>
-            <a:r>
               <a:rPr lang="de-DE" dirty="0"/>
-              <a:t> Gate </a:t>
-            </a:r>
-          </a:p>
-        </p:txBody>
-      </p:sp>
-      <p:sp>
-        <p:nvSpPr>
-          <p:cNvPr id="3" name="Textplatzhalter 2">
-            <a:extLst>
-              <a:ext uri="{FF2B5EF4-FFF2-40B4-BE49-F238E27FC236}">
-                <a16:creationId xmlns:a16="http://schemas.microsoft.com/office/drawing/2014/main" id="{05E2054D-57CA-4D2C-B6D9-F12C51C7A458}"/>
-              </a:ext>
-            </a:extLst>
-          </p:cNvPr>
-          <p:cNvSpPr>
-            <a:spLocks noGrp="1"/>
-          </p:cNvSpPr>
-          <p:nvPr>
-            <p:ph type="body" sz="quarter" idx="15"/>
-          </p:nvPr>
-        </p:nvSpPr>
-        <p:spPr/>
-        <p:txBody>
-          <a:bodyPr/>
-          <a:lstStyle/>
-          <a:p>
-            <a:endParaRPr lang="de-DE"/>
+              <a:t>Generische Gatter</a:t>
+            </a:r>
           </a:p>
         </p:txBody>
       </p:sp>
@@ -7936,7 +7516,7 @@
             <a:fld id="{797C2BE3-76C9-4662-9010-556118ECBB0B}" type="datetime1">
               <a:rPr lang="de-DE" smtClean="0"/>
               <a:pPr/>
-              <a:t>02.06.2026</a:t>
+              <a:t>03.06.2026</a:t>
             </a:fld>
             <a:endParaRPr lang="de-DE"/>
           </a:p>
@@ -8002,10 +7582,10 @@
       </p:sp>
       <p:pic>
         <p:nvPicPr>
-          <p:cNvPr id="21" name="Grafik 20">
-            <a:extLst>
-              <a:ext uri="{FF2B5EF4-FFF2-40B4-BE49-F238E27FC236}">
-                <a16:creationId xmlns:a16="http://schemas.microsoft.com/office/drawing/2014/main" id="{9816252F-BFDD-F91F-0C67-AD5ADDC0E458}"/>
+          <p:cNvPr id="7" name="Grafik 6">
+            <a:extLst>
+              <a:ext uri="{FF2B5EF4-FFF2-40B4-BE49-F238E27FC236}">
+                <a16:creationId xmlns:a16="http://schemas.microsoft.com/office/drawing/2014/main" id="{9BA1B6E3-2B24-4DAC-94A2-AC7114ECE5C7}"/>
               </a:ext>
             </a:extLst>
           </p:cNvPr>
@@ -8022,8 +7602,8 @@
         </p:blipFill>
         <p:spPr>
           <a:xfrm>
-            <a:off x="1955020" y="1261387"/>
-            <a:ext cx="6853556" cy="5292321"/>
+            <a:off x="1228898" y="1458745"/>
+            <a:ext cx="6066529" cy="4684578"/>
           </a:xfrm>
           <a:prstGeom prst="rect">
             <a:avLst/>
@@ -8033,7 +7613,7 @@
     </p:spTree>
     <p:extLst>
       <p:ext uri="{BB962C8B-B14F-4D97-AF65-F5344CB8AC3E}">
-        <p14:creationId xmlns:p14="http://schemas.microsoft.com/office/powerpoint/2010/main" val="4198435299"/>
+        <p14:creationId xmlns:p14="http://schemas.microsoft.com/office/powerpoint/2010/main" val="333568302"/>
       </p:ext>
     </p:extLst>
   </p:cSld>
@@ -8082,46 +7662,9 @@
           <a:lstStyle/>
           <a:p>
             <a:r>
-              <a:rPr lang="de-DE" dirty="0" err="1"/>
-              <a:t>Generic</a:t>
-            </a:r>
-            <a:r>
               <a:rPr lang="de-DE" dirty="0"/>
-              <a:t> </a:t>
-            </a:r>
-            <a:r>
-              <a:rPr lang="de-DE" dirty="0" err="1"/>
-              <a:t>gate</a:t>
-            </a:r>
-            <a:r>
-              <a:rPr lang="de-DE" dirty="0"/>
-              <a:t> simulieren</a:t>
-            </a:r>
-          </a:p>
-        </p:txBody>
-      </p:sp>
-      <p:sp>
-        <p:nvSpPr>
-          <p:cNvPr id="3" name="Textplatzhalter 2">
-            <a:extLst>
-              <a:ext uri="{FF2B5EF4-FFF2-40B4-BE49-F238E27FC236}">
-                <a16:creationId xmlns:a16="http://schemas.microsoft.com/office/drawing/2014/main" id="{05E2054D-57CA-4D2C-B6D9-F12C51C7A458}"/>
-              </a:ext>
-            </a:extLst>
-          </p:cNvPr>
-          <p:cNvSpPr>
-            <a:spLocks noGrp="1"/>
-          </p:cNvSpPr>
-          <p:nvPr>
-            <p:ph type="body" sz="quarter" idx="15"/>
-          </p:nvPr>
-        </p:nvSpPr>
-        <p:spPr/>
-        <p:txBody>
-          <a:bodyPr/>
-          <a:lstStyle/>
-          <a:p>
-            <a:endParaRPr lang="de-DE" dirty="0"/>
+              <a:t>Generische Gatter - Simulation</a:t>
+            </a:r>
           </a:p>
         </p:txBody>
       </p:sp>
@@ -8149,7 +7692,7 @@
             <a:fld id="{797C2BE3-76C9-4662-9010-556118ECBB0B}" type="datetime1">
               <a:rPr lang="de-DE" smtClean="0"/>
               <a:pPr/>
-              <a:t>02.06.2026</a:t>
+              <a:t>03.06.2026</a:t>
             </a:fld>
             <a:endParaRPr lang="de-DE"/>
           </a:p>
@@ -8215,10 +7758,10 @@
       </p:sp>
       <p:pic>
         <p:nvPicPr>
-          <p:cNvPr id="19" name="Grafik 18">
-            <a:extLst>
-              <a:ext uri="{FF2B5EF4-FFF2-40B4-BE49-F238E27FC236}">
-                <a16:creationId xmlns:a16="http://schemas.microsoft.com/office/drawing/2014/main" id="{288150DE-DCE0-94DA-B1BA-88566D2ABEBE}"/>
+          <p:cNvPr id="7" name="Grafik 6">
+            <a:extLst>
+              <a:ext uri="{FF2B5EF4-FFF2-40B4-BE49-F238E27FC236}">
+                <a16:creationId xmlns:a16="http://schemas.microsoft.com/office/drawing/2014/main" id="{73218106-815B-40D5-9C97-6CB5B9FCECAC}"/>
               </a:ext>
             </a:extLst>
           </p:cNvPr>
@@ -8235,8 +7778,8 @@
         </p:blipFill>
         <p:spPr>
           <a:xfrm>
-            <a:off x="688078" y="2218063"/>
-            <a:ext cx="9387439" cy="3378970"/>
+            <a:off x="1228898" y="1458745"/>
+            <a:ext cx="8971545" cy="3229271"/>
           </a:xfrm>
           <a:prstGeom prst="rect">
             <a:avLst/>
@@ -8246,7 +7789,7 @@
     </p:spTree>
     <p:extLst>
       <p:ext uri="{BB962C8B-B14F-4D97-AF65-F5344CB8AC3E}">
-        <p14:creationId xmlns:p14="http://schemas.microsoft.com/office/powerpoint/2010/main" val="18464587"/>
+        <p14:creationId xmlns:p14="http://schemas.microsoft.com/office/powerpoint/2010/main" val="740122111"/>
       </p:ext>
     </p:extLst>
   </p:cSld>
@@ -8296,38 +7839,8 @@
           <a:p>
             <a:r>
               <a:rPr lang="de-DE" dirty="0"/>
-              <a:t>Mehrbenutzer </a:t>
-            </a:r>
-            <a:r>
-              <a:rPr lang="de-DE" dirty="0" err="1"/>
-              <a:t>modus</a:t>
-            </a:r>
-            <a:endParaRPr lang="de-DE" dirty="0"/>
-          </a:p>
-        </p:txBody>
-      </p:sp>
-      <p:sp>
-        <p:nvSpPr>
-          <p:cNvPr id="3" name="Textplatzhalter 2">
-            <a:extLst>
-              <a:ext uri="{FF2B5EF4-FFF2-40B4-BE49-F238E27FC236}">
-                <a16:creationId xmlns:a16="http://schemas.microsoft.com/office/drawing/2014/main" id="{05E2054D-57CA-4D2C-B6D9-F12C51C7A458}"/>
-              </a:ext>
-            </a:extLst>
-          </p:cNvPr>
-          <p:cNvSpPr>
-            <a:spLocks noGrp="1"/>
-          </p:cNvSpPr>
-          <p:nvPr>
-            <p:ph type="body" sz="quarter" idx="15"/>
-          </p:nvPr>
-        </p:nvSpPr>
-        <p:spPr/>
-        <p:txBody>
-          <a:bodyPr/>
-          <a:lstStyle/>
-          <a:p>
-            <a:endParaRPr lang="de-DE"/>
+              <a:t>Mehrbenutzer-Modus</a:t>
+            </a:r>
           </a:p>
         </p:txBody>
       </p:sp>
@@ -8355,7 +7868,7 @@
             <a:fld id="{797C2BE3-76C9-4662-9010-556118ECBB0B}" type="datetime1">
               <a:rPr lang="de-DE" smtClean="0"/>
               <a:pPr/>
-              <a:t>02.06.2026</a:t>
+              <a:t>03.06.2026</a:t>
             </a:fld>
             <a:endParaRPr lang="de-DE"/>
           </a:p>
@@ -8421,10 +7934,10 @@
       </p:sp>
       <p:pic>
         <p:nvPicPr>
-          <p:cNvPr id="23" name="Grafik 22">
-            <a:extLst>
-              <a:ext uri="{FF2B5EF4-FFF2-40B4-BE49-F238E27FC236}">
-                <a16:creationId xmlns:a16="http://schemas.microsoft.com/office/drawing/2014/main" id="{C5451AF7-C35A-06C0-AB35-3814D811BB7B}"/>
+          <p:cNvPr id="7" name="Grafik 6">
+            <a:extLst>
+              <a:ext uri="{FF2B5EF4-FFF2-40B4-BE49-F238E27FC236}">
+                <a16:creationId xmlns:a16="http://schemas.microsoft.com/office/drawing/2014/main" id="{0868648A-2030-4B1B-A477-F6FA72AD4195}"/>
               </a:ext>
             </a:extLst>
           </p:cNvPr>
@@ -8441,8 +7954,8 @@
         </p:blipFill>
         <p:spPr>
           <a:xfrm>
-            <a:off x="947848" y="1310181"/>
-            <a:ext cx="10015254" cy="4935375"/>
+            <a:off x="1228897" y="1452087"/>
+            <a:ext cx="9335529" cy="4600416"/>
           </a:xfrm>
           <a:prstGeom prst="rect">
             <a:avLst/>
@@ -8452,7 +7965,7 @@
     </p:spTree>
     <p:extLst>
       <p:ext uri="{BB962C8B-B14F-4D97-AF65-F5344CB8AC3E}">
-        <p14:creationId xmlns:p14="http://schemas.microsoft.com/office/powerpoint/2010/main" val="4220658772"/>
+        <p14:creationId xmlns:p14="http://schemas.microsoft.com/office/powerpoint/2010/main" val="3486881879"/>
       </p:ext>
     </p:extLst>
   </p:cSld>
@@ -8688,7 +8201,7 @@
                 </a:solidFill>
               </a:rPr>
               <a:pPr/>
-              <a:t>02.06.2026</a:t>
+              <a:t>03.06.2026</a:t>
             </a:fld>
             <a:endParaRPr lang="de-DE">
               <a:solidFill>
@@ -8945,7 +8458,7 @@
             <a:fld id="{797C2BE3-76C9-4662-9010-556118ECBB0B}" type="datetime1">
               <a:rPr lang="de-DE" smtClean="0"/>
               <a:pPr/>
-              <a:t>02.06.2026</a:t>
+              <a:t>03.06.2026</a:t>
             </a:fld>
             <a:endParaRPr lang="de-DE"/>
           </a:p>
@@ -9135,7 +8648,7 @@
             <a:fld id="{797C2BE3-76C9-4662-9010-556118ECBB0B}" type="datetime1">
               <a:rPr lang="de-DE" smtClean="0"/>
               <a:pPr/>
-              <a:t>02.06.2026</a:t>
+              <a:t>03.06.2026</a:t>
             </a:fld>
             <a:endParaRPr lang="de-DE"/>
           </a:p>
@@ -9335,22 +8848,10 @@
               <a:buChar char="§"/>
             </a:pPr>
             <a:r>
-              <a:rPr lang="de-DE" dirty="0">
-                <a:ea typeface="Cambria"/>
-              </a:rPr>
-              <a:t>Florian Blum: Demo-Vorbereitung, Wochenaufgaben,</a:t>
-            </a:r>
-            <a:r>
               <a:rPr lang="de-DE">
                 <a:ea typeface="Cambria"/>
               </a:rPr>
-              <a:t> Gatter- &amp; Editordarstellung</a:t>
-            </a:r>
-            <a:r>
-              <a:rPr lang="de-DE" dirty="0">
-                <a:ea typeface="Cambria"/>
-              </a:rPr>
-              <a:t> </a:t>
+              <a:t>Florian Blum: Wochenaufgaben, Gatter- &amp; Editordarstellung </a:t>
             </a:r>
           </a:p>
           <a:p>
@@ -9424,7 +8925,7 @@
             <a:fld id="{797C2BE3-76C9-4662-9010-556118ECBB0B}" type="datetime1">
               <a:rPr lang="de-DE" smtClean="0"/>
               <a:pPr/>
-              <a:t>02.06.2026</a:t>
+              <a:t>03.06.2026</a:t>
             </a:fld>
             <a:endParaRPr lang="de-DE"/>
           </a:p>
@@ -9597,7 +9098,7 @@
             <a:fld id="{797C2BE3-76C9-4662-9010-556118ECBB0B}" type="datetime1">
               <a:rPr lang="de-DE" smtClean="0"/>
               <a:pPr/>
-              <a:t>02.06.2026</a:t>
+              <a:t>03.06.2026</a:t>
             </a:fld>
             <a:endParaRPr lang="de-DE"/>
           </a:p>
@@ -9845,7 +9346,7 @@
             <a:fld id="{797C2BE3-76C9-4662-9010-556118ECBB0B}" type="datetime1">
               <a:rPr lang="de-DE" smtClean="0"/>
               <a:pPr/>
-              <a:t>02.06.2026</a:t>
+              <a:t>03.06.2026</a:t>
             </a:fld>
             <a:endParaRPr lang="de-DE"/>
           </a:p>
@@ -10111,7 +9612,7 @@
             <a:fld id="{797C2BE3-76C9-4662-9010-556118ECBB0B}" type="datetime1">
               <a:rPr lang="de-DE" smtClean="0"/>
               <a:pPr/>
-              <a:t>02.06.2026</a:t>
+              <a:t>03.06.2026</a:t>
             </a:fld>
             <a:endParaRPr lang="de-DE"/>
           </a:p>
@@ -10431,7 +9932,7 @@
             <a:fld id="{797C2BE3-76C9-4662-9010-556118ECBB0B}" type="datetime1">
               <a:rPr lang="de-DE" smtClean="0"/>
               <a:pPr/>
-              <a:t>02.06.2026</a:t>
+              <a:t>03.06.2026</a:t>
             </a:fld>
             <a:endParaRPr lang="de-DE"/>
           </a:p>
@@ -10670,7 +10171,7 @@
             <a:fld id="{797C2BE3-76C9-4662-9010-556118ECBB0B}" type="datetime1">
               <a:rPr lang="de-DE" smtClean="0"/>
               <a:pPr/>
-              <a:t>02.06.2026</a:t>
+              <a:t>03.06.2026</a:t>
             </a:fld>
             <a:endParaRPr lang="de-DE"/>
           </a:p>
@@ -10819,92 +10320,115 @@
               <a:rPr lang="de-DE">
                 <a:ea typeface="Cambria" panose="02040503050406030204"/>
               </a:rPr>
-              <a:t>4+1 </a:t>
+              <a:t>Komponentenstruktur</a:t>
+            </a:r>
+          </a:p>
+          <a:p>
+            <a:pPr>
+              <a:buClr>
+                <a:srgbClr val="FFFFFF"/>
+              </a:buClr>
+            </a:pPr>
+            <a:r>
+              <a:rPr lang="de-DE">
+                <a:ea typeface="Cambria" panose="02040503050406030204"/>
+              </a:rPr>
+              <a:t>Single Page </a:t>
             </a:r>
             <a:r>
               <a:rPr lang="de-DE" err="1">
                 <a:ea typeface="Cambria" panose="02040503050406030204"/>
               </a:rPr>
-              <a:t>Sichtenmodell</a:t>
-            </a:r>
-          </a:p>
-          <a:p>
-            <a:pPr lvl="1"/>
+              <a:t>Application</a:t>
+            </a:r>
+            <a:endParaRPr lang="de-DE">
+              <a:ea typeface="Cambria" panose="02040503050406030204"/>
+            </a:endParaRPr>
+          </a:p>
+          <a:p>
+            <a:pPr>
+              <a:buClr>
+                <a:srgbClr val="FFFFFF"/>
+              </a:buClr>
+            </a:pPr>
             <a:r>
               <a:rPr lang="de-DE">
                 <a:ea typeface="Cambria" panose="02040503050406030204"/>
               </a:rPr>
-              <a:t>UI</a:t>
-            </a:r>
-          </a:p>
-          <a:p>
-            <a:pPr lvl="1"/>
+              <a:t>Trennen von UI, Schaltungslogik und Persistenz</a:t>
+            </a:r>
+          </a:p>
+          <a:p>
+            <a:pPr marL="0" indent="0">
+              <a:buClr>
+                <a:srgbClr val="FFFFFF"/>
+              </a:buClr>
+              <a:buNone/>
+            </a:pPr>
             <a:r>
               <a:rPr lang="de-DE">
                 <a:ea typeface="Cambria" panose="02040503050406030204"/>
               </a:rPr>
-              <a:t>Domain</a:t>
-            </a:r>
-          </a:p>
-          <a:p>
-            <a:pPr lvl="1"/>
+              <a:t>  ⇒ UI bleibt responsiv</a:t>
+            </a:r>
+          </a:p>
+          <a:p>
+            <a:pPr>
+              <a:buClr>
+                <a:srgbClr val="FFFFFF"/>
+              </a:buClr>
+            </a:pPr>
             <a:r>
               <a:rPr lang="de-DE">
                 <a:ea typeface="Cambria" panose="02040503050406030204"/>
               </a:rPr>
-              <a:t>Simulation</a:t>
-            </a:r>
-          </a:p>
-          <a:p>
-            <a:pPr lvl="1"/>
+              <a:t>Lokale Simulation im </a:t>
+            </a:r>
+            <a:r>
+              <a:rPr lang="de-DE" err="1">
+                <a:ea typeface="Cambria" panose="02040503050406030204"/>
+              </a:rPr>
+              <a:t>Clien</a:t>
+            </a:r>
             <a:r>
               <a:rPr lang="de-DE">
                 <a:ea typeface="Cambria" panose="02040503050406030204"/>
               </a:rPr>
-              <a:t>Storage</a:t>
-            </a:r>
-          </a:p>
-          <a:p>
-            <a:pPr lvl="1"/>
+              <a:t>t</a:t>
+            </a:r>
+          </a:p>
+          <a:p>
+            <a:pPr marL="0" indent="0">
+              <a:buClr>
+                <a:srgbClr val="FFFFFF"/>
+              </a:buClr>
+              <a:buNone/>
+            </a:pPr>
             <a:r>
               <a:rPr lang="de-DE">
                 <a:ea typeface="Cambria" panose="02040503050406030204"/>
               </a:rPr>
-              <a:t>Library</a:t>
-            </a:r>
-          </a:p>
-          <a:p>
+              <a:t>  ⇒ Schnellere Darstellung</a:t>
+            </a:r>
+          </a:p>
+          <a:p>
+            <a:pPr>
+              <a:buClr>
+                <a:srgbClr val="FFFFFF"/>
+              </a:buClr>
+            </a:pPr>
             <a:r>
               <a:rPr lang="de-DE">
                 <a:ea typeface="Cambria" panose="02040503050406030204"/>
               </a:rPr>
-              <a:t>Simulation isoliert (eigener Prozess) </a:t>
-            </a:r>
-          </a:p>
-          <a:p>
-            <a:pPr marL="0" indent="0">
-              <a:buNone/>
-            </a:pPr>
-            <a:r>
-              <a:rPr lang="de-DE">
-                <a:ea typeface="Cambria" panose="02040503050406030204"/>
-              </a:rPr>
-              <a:t>	⇒ UI bleibt responsiv</a:t>
-            </a:r>
-          </a:p>
-          <a:p>
-            <a:pPr marL="0" indent="0">
-              <a:buNone/>
-            </a:pPr>
+              <a:t>Erweiterbare Bausteinbibliothek</a:t>
+            </a:r>
+          </a:p>
+          <a:p>
             <a:endParaRPr lang="de-DE">
               <a:ea typeface="Cambria" panose="02040503050406030204"/>
             </a:endParaRPr>
           </a:p>
-          <a:p>
-            <a:endParaRPr lang="de-DE">
-              <a:ea typeface="Cambria" panose="02040503050406030204"/>
-            </a:endParaRPr>
-          </a:p>
         </p:txBody>
       </p:sp>
       <p:sp>
@@ -10931,7 +10455,7 @@
             <a:fld id="{797C2BE3-76C9-4662-9010-556118ECBB0B}" type="datetime1">
               <a:rPr lang="de-DE" smtClean="0"/>
               <a:pPr/>
-              <a:t>02.06.2026</a:t>
+              <a:t>03.06.2026</a:t>
             </a:fld>
             <a:endParaRPr lang="de-DE"/>
           </a:p>
@@ -11075,34 +10599,59 @@
           <a:lstStyle/>
           <a:p>
             <a:r>
-              <a:rPr lang="de-DE"/>
+              <a:rPr lang="de-DE" dirty="0"/>
               <a:t>Factory - Baustein-Erzeugung</a:t>
             </a:r>
           </a:p>
           <a:p>
             <a:r>
-              <a:rPr lang="de-DE" err="1"/>
+              <a:rPr lang="de-DE" dirty="0" err="1"/>
               <a:t>Strategy</a:t>
             </a:r>
             <a:r>
-              <a:rPr lang="de-DE"/>
+              <a:rPr lang="de-DE" dirty="0"/>
               <a:t> - Simulations- / Validierungsstrategien</a:t>
             </a:r>
-          </a:p>
-          <a:p>
-            <a:r>
-              <a:rPr lang="de-DE"/>
+            <a:endParaRPr lang="de-DE" dirty="0">
+              <a:ea typeface="Cambria"/>
+            </a:endParaRPr>
+          </a:p>
+          <a:p>
+            <a:r>
+              <a:rPr lang="de-DE" dirty="0"/>
               <a:t>Composite - Custom Components aus Sub-Schaltungen</a:t>
             </a:r>
           </a:p>
           <a:p>
-            <a:r>
-              <a:rPr lang="de-DE"/>
-              <a:t>Observer &amp; Repository - UI-Updates / Persistenz</a:t>
-            </a:r>
-          </a:p>
-          <a:p>
+            <a:pPr>
+              <a:buClr>
+                <a:srgbClr val="FFFFFF"/>
+              </a:buClr>
+            </a:pPr>
+            <a:r>
+              <a:rPr lang="de-DE">
+                <a:ea typeface="Cambria" panose="02040503050406030204"/>
+              </a:rPr>
+              <a:t>Observer - UI-Updates</a:t>
+            </a:r>
             <a:endParaRPr lang="de-DE"/>
+          </a:p>
+          <a:p>
+            <a:pPr>
+              <a:buClr>
+                <a:srgbClr val="FFFFFF"/>
+              </a:buClr>
+            </a:pPr>
+            <a:r>
+              <a:rPr lang="de-DE" dirty="0">
+                <a:ea typeface="Cambria"/>
+              </a:rPr>
+              <a:t>Repository - Persistenz</a:t>
+            </a:r>
+            <a:endParaRPr lang="de-DE" dirty="0"/>
+          </a:p>
+          <a:p>
+            <a:endParaRPr lang="de-DE" dirty="0"/>
           </a:p>
         </p:txBody>
       </p:sp>
@@ -11130,7 +10679,7 @@
             <a:fld id="{797C2BE3-76C9-4662-9010-556118ECBB0B}" type="datetime1">
               <a:rPr lang="de-DE" smtClean="0"/>
               <a:pPr/>
-              <a:t>02.06.2026</a:t>
+              <a:t>03.06.2026</a:t>
             </a:fld>
             <a:endParaRPr lang="de-DE"/>
           </a:p>
@@ -11270,7 +10819,12 @@
                 <p:ph type="body" sz="quarter" idx="15"/>
               </p:nvPr>
             </p:nvSpPr>
-            <p:spPr/>
+            <p:spPr>
+              <a:xfrm>
+                <a:off x="838199" y="1471035"/>
+                <a:ext cx="8696499" cy="4576295"/>
+              </a:xfrm>
+            </p:spPr>
             <p:txBody>
               <a:bodyPr>
                 <a:normAutofit/>
@@ -11278,7 +10832,7 @@
               <a:lstStyle/>
               <a:p>
                 <a:r>
-                  <a:rPr lang="de-DE"/>
+                  <a:rPr lang="de-DE" b="1"/>
                   <a:t>Frontend</a:t>
                 </a:r>
               </a:p>
@@ -11306,8 +10860,8 @@
               </a:p>
               <a:p>
                 <a:r>
-                  <a:rPr lang="de-DE"/>
-                  <a:t>Backend: </a:t>
+                  <a:rPr lang="de-DE" b="1"/>
+                  <a:t>Backend</a:t>
                 </a:r>
               </a:p>
               <a:p>
@@ -11326,13 +10880,10 @@
               </a:p>
               <a:p>
                 <a:r>
-                  <a:rPr lang="de-DE" err="1"/>
+                  <a:rPr lang="de-DE" b="1" err="1"/>
                   <a:t>Deployment</a:t>
                 </a:r>
-                <a:r>
-                  <a:rPr lang="de-DE"/>
-                  <a:t>: </a:t>
-                </a:r>
+                <a:endParaRPr lang="de-DE" b="1"/>
               </a:p>
               <a:p>
                 <a:pPr lvl="1"/>
@@ -11397,6 +10948,10 @@
               </p:nvPr>
             </p:nvSpPr>
             <p:spPr>
+              <a:xfrm>
+                <a:off x="838199" y="1471035"/>
+                <a:ext cx="8696499" cy="4576295"/>
+              </a:xfrm>
               <a:blipFill>
                 <a:blip r:embed="rId3"/>
                 <a:stretch>
@@ -11409,7 +10964,7 @@
               <a:lstStyle/>
               <a:p>
                 <a:r>
-                  <a:rPr lang="de-DE">
+                  <a:rPr lang="en-US">
                     <a:noFill/>
                   </a:rPr>
                   <a:t> </a:t>
@@ -11443,7 +10998,7 @@
             <a:fld id="{797C2BE3-76C9-4662-9010-556118ECBB0B}" type="datetime1">
               <a:rPr lang="de-DE" smtClean="0"/>
               <a:pPr/>
-              <a:t>02.06.2026</a:t>
+              <a:t>03.06.2026</a:t>
             </a:fld>
             <a:endParaRPr lang="de-DE"/>
           </a:p>
@@ -11584,11 +11139,13 @@
         <p:spPr>
           <a:xfrm>
             <a:off x="838199" y="1458745"/>
-            <a:ext cx="8696499" cy="1970255"/>
+            <a:ext cx="8696499" cy="2143764"/>
           </a:xfrm>
         </p:spPr>
         <p:txBody>
-          <a:bodyPr/>
+          <a:bodyPr>
+            <a:normAutofit/>
+          </a:bodyPr>
           <a:lstStyle/>
           <a:p>
             <a:r>
@@ -11605,6 +11162,10 @@
             </a:r>
           </a:p>
           <a:p>
+            <a:pPr lvl="1">
+              <a:buFont typeface="Wingdings" panose="020B0604020202020204" pitchFamily="34" charset="0"/>
+              <a:buChar char="§"/>
+            </a:pPr>
             <a:r>
               <a:rPr lang="de-DE"/>
               <a:t>Unit, </a:t>
@@ -11617,6 +11178,9 @@
               <a:rPr lang="de-DE"/>
               <a:t>, Integration, Smoke Tests</a:t>
             </a:r>
+            <a:endParaRPr lang="de-DE">
+              <a:ea typeface="Cambria"/>
+            </a:endParaRPr>
           </a:p>
           <a:p>
             <a:r>
@@ -11630,6 +11194,16 @@
             <a:r>
               <a:rPr lang="de-DE"/>
               <a:t>), Tests und Coverage aus</a:t>
+            </a:r>
+          </a:p>
+          <a:p>
+            <a:r>
+              <a:rPr lang="de-DE" err="1"/>
+              <a:t>SecurityHotspots</a:t>
+            </a:r>
+            <a:r>
+              <a:rPr lang="de-DE"/>
+              <a:t> (Sonarcube)</a:t>
             </a:r>
           </a:p>
           <a:p>
@@ -11661,7 +11235,7 @@
             <a:fld id="{797C2BE3-76C9-4662-9010-556118ECBB0B}" type="datetime1">
               <a:rPr lang="de-DE" smtClean="0"/>
               <a:pPr/>
-              <a:t>02.06.2026</a:t>
+              <a:t>03.06.2026</a:t>
             </a:fld>
             <a:endParaRPr lang="de-DE"/>
           </a:p>
@@ -11946,7 +11520,7 @@
             <a:fld id="{797C2BE3-76C9-4662-9010-556118ECBB0B}" type="datetime1">
               <a:rPr lang="de-DE" smtClean="0"/>
               <a:pPr/>
-              <a:t>02.06.2026</a:t>
+              <a:t>03.06.2026</a:t>
             </a:fld>
             <a:endParaRPr lang="de-DE"/>
           </a:p>
@@ -12032,8 +11606,8 @@
         </p:blipFill>
         <p:spPr>
           <a:xfrm>
-            <a:off x="838198" y="3853424"/>
-            <a:ext cx="9021481" cy="1455423"/>
+            <a:off x="838198" y="3657600"/>
+            <a:ext cx="9078159" cy="1651248"/>
           </a:xfrm>
           <a:prstGeom prst="roundRect">
             <a:avLst>
